--- a/content/decks/media-studies/media-studies-s1-lesson-19-end-of-term-exam-and-return.pptx
+++ b/content/decks/media-studies/media-studies-s1-lesson-19-end-of-term-exam-and-return.pptx
@@ -2145,7 +2145,7 @@
                 <a:ea typeface="Georgia" pitchFamily="34" charset="-122"/>
                 <a:cs typeface="Georgia" pitchFamily="34" charset="-120"/>
               </a:rPr>
-              <a:t>Sixteen lessons, one arc: media language to the exam that tests it. Semester II opens with evidence.</a:t>
+              <a:t>Nineteen lessons, one arc: media language to the exam that tests it. Semester II opens with evidence.</a:t>
             </a:r>
             <a:endParaRPr lang="en-US" sz="1900" dirty="0"/>
           </a:p>

--- a/content/decks/media-studies/media-studies-s1-lesson-19-end-of-term-exam-and-return.pptx
+++ b/content/decks/media-studies/media-studies-s1-lesson-19-end-of-term-exam-and-return.pptx
@@ -15,9 +15,10 @@
     <p:sldId id="263" r:id="rId9"/>
     <p:sldId id="264" r:id="rId10"/>
     <p:sldId id="265" r:id="rId11"/>
+    <p:sldId id="266" r:id="rId12"/>
   </p:sldIdLst>
   <p:notesMasterIdLst>
-    <p:notesMasterId r:id="rId12"/>
+    <p:notesMasterId r:id="rId13"/>
   </p:notesMasterIdLst>
   <p:sldSz cx="12192000" cy="6858000"/>
   <p:notesSz cx="6858000" cy="12192000"/>
@@ -511,7 +512,7 @@
           <a:p>
             <a:r>
               <a:rPr lang="en-US" dirty="0"/>
-              <a:t>The semester closes the way Semester 2 will open: with evidence. The full two-hour paper is sat in the exam window.</a:t>
+              <a:t>The semester closes the way Semester 2 will open: with evidence. The full two-hour paper is sat in the exam window. Teacher-only: the paper is June 2024/22 (Servant, Ep 1, 'Reborn', 00:00 to 05:02, MS 23 in holdings); source the clip in advance, book the screening facilities, and never name the paper before the sitting.</a:t>
             </a:r>
             <a:endParaRPr lang="en-US" dirty="0"/>
           </a:p>
@@ -599,7 +600,7 @@
           <a:p>
             <a:r>
               <a:rPr lang="en-US" dirty="0"/>
-              <a:t/>
+              <a:t>Wager procedure: same wording as September, hands up, count recorded beside the week-one number. The coursebook's U6 to U8 numbering is its own, not a calendar; do not read it as one aloud.</a:t>
             </a:r>
             <a:endParaRPr lang="en-US" dirty="0"/>
           </a:p>
@@ -623,6 +624,94 @@
             <a:fld id="{F7021451-1387-4CA6-816F-3879F97B5CBC}" type="slidenum">
               <a:rPr lang="en-US"/>
               <a:t>10</a:t>
+            </a:fld>
+            <a:endParaRPr lang="en-US"/>
+          </a:p>
+        </p:txBody>
+      </p:sp>
+    </p:spTree>
+    <p:extLst>
+      <p:ext uri="{BB962C8B-B14F-4D97-AF65-F5344CB8AC3E}">
+        <p14:creationId xmlns:p14="http://schemas.microsoft.com/office/powerpoint/2010/main" val="1024086991"/>
+      </p:ext>
+    </p:extLst>
+  </p:cSld>
+  <p:clrMapOvr>
+    <a:masterClrMapping/>
+  </p:clrMapOvr>
+</p:notes>
+</file>
+
+<file path=ppt/notesSlides/notesSlide11.xml><?xml version="1.0" encoding="utf-8"?>
+<p:notes xmlns:a="http://schemas.openxmlformats.org/drawingml/2006/main" xmlns:r="http://schemas.openxmlformats.org/officeDocument/2006/relationships" xmlns:p="http://schemas.openxmlformats.org/presentationml/2006/main">
+  <p:cSld>
+    <p:spTree>
+      <p:nvGrpSpPr>
+        <p:cNvPr id="1" name=""/>
+        <p:cNvGrpSpPr/>
+        <p:nvPr/>
+      </p:nvGrpSpPr>
+      <p:grpSpPr>
+        <a:xfrm>
+          <a:off x="0" y="0"/>
+          <a:ext cx="0" cy="0"/>
+          <a:chOff x="0" y="0"/>
+          <a:chExt cx="0" cy="0"/>
+        </a:xfrm>
+      </p:grpSpPr>
+      <p:sp>
+        <p:nvSpPr>
+          <p:cNvPr id="2" name="Slide Image Placeholder 1"/>
+          <p:cNvSpPr>
+            <a:spLocks noGrp="1" noRot="1" noChangeAspect="1"/>
+          </p:cNvSpPr>
+          <p:nvPr>
+            <p:ph type="sldImg"/>
+          </p:nvPr>
+        </p:nvSpPr>
+        <p:spPr/>
+      </p:sp>
+      <p:sp>
+        <p:nvSpPr>
+          <p:cNvPr id="3" name="Notes Placeholder 2"/>
+          <p:cNvSpPr>
+            <a:spLocks noGrp="1"/>
+          </p:cNvSpPr>
+          <p:nvPr>
+            <p:ph type="body" idx="1"/>
+          </p:nvPr>
+        </p:nvSpPr>
+        <p:spPr/>
+        <p:txBody>
+          <a:bodyPr/>
+          <a:lstStyle/>
+          <a:p>
+            <a:r>
+              <a:rPr lang="en-US" dirty="0"/>
+              <a:t/>
+            </a:r>
+            <a:endParaRPr lang="en-US" dirty="0"/>
+          </a:p>
+        </p:txBody>
+      </p:sp>
+      <p:sp>
+        <p:nvSpPr>
+          <p:cNvPr id="4" name="Slide Number Placeholder 3"/>
+          <p:cNvSpPr>
+            <a:spLocks noGrp="1"/>
+          </p:cNvSpPr>
+          <p:nvPr>
+            <p:ph type="sldNum" sz="quarter" idx="10"/>
+          </p:nvPr>
+        </p:nvSpPr>
+        <p:spPr/>
+        <p:txBody>
+          <a:bodyPr/>
+          <a:lstStyle/>
+          <a:p>
+            <a:fld id="{F7021451-1387-4CA6-816F-3879F97B5CBC}" type="slidenum">
+              <a:rPr lang="en-US"/>
+              <a:t>11</a:t>
             </a:fld>
             <a:endParaRPr lang="en-US"/>
           </a:p>
@@ -775,7 +864,7 @@
           <a:p>
             <a:r>
               <a:rPr lang="en-US" dirty="0"/>
-              <a:t/>
+              <a:t>The cover shown is June 2024/21, the paper the room already worked with; the sitting's own cover is identical in format. The paper is never named before the exam.</a:t>
             </a:r>
             <a:endParaRPr lang="en-US" dirty="0"/>
           </a:p>
@@ -863,7 +952,7 @@
           <a:p>
             <a:r>
               <a:rPr lang="en-US" dirty="0"/>
-              <a:t/>
+              <a:t>Monet's winter field, after the effort. Shown at the top of the return session to slow the room down before the scripts come back.</a:t>
             </a:r>
             <a:endParaRPr lang="en-US" dirty="0"/>
           </a:p>
@@ -951,7 +1040,7 @@
           <a:p>
             <a:r>
               <a:rPr lang="en-US" dirty="0"/>
-              <a:t/>
+              <a:t>WS 7.4's peer-editing checklist structures the peer step of the return. The nine-day marking window ran on WS 4.6's comment bank; showing the instrument makes the breakdown legible.</a:t>
             </a:r>
             <a:endParaRPr lang="en-US" dirty="0"/>
           </a:p>
@@ -1039,7 +1128,7 @@
           <a:p>
             <a:r>
               <a:rPr lang="en-US" dirty="0"/>
-              <a:t>Monet's winter field, after the effort. Use it to slow the room down before the scripts come back.</a:t>
+              <a:t/>
             </a:r>
             <a:endParaRPr lang="en-US" dirty="0"/>
           </a:p>
@@ -1127,7 +1216,7 @@
           <a:p>
             <a:r>
               <a:rPr lang="en-US" dirty="0"/>
-              <a:t/>
+              <a:t>HARD RULE: this slide is shown on the return day only, after the exam office confirms no make-up sitting is outstanding. If any student has not sat, skip the slide entirely; it names and shows the sealed text. MS 23 pages 6 to 9 carry the full worked reading if the room wants more than the Meaning paragraph.</a:t>
             </a:r>
             <a:endParaRPr lang="en-US" dirty="0"/>
           </a:p>
@@ -1215,7 +1304,7 @@
           <a:p>
             <a:r>
               <a:rPr lang="en-US" dirty="0"/>
-              <a:t/>
+              <a:t>The exemplar is written for a fictional student on the plan's own model sentence; it shows the grain of a usable sheet. Review dates land in a named S2 week, before the first S2 attainment.</a:t>
             </a:r>
             <a:endParaRPr lang="en-US" dirty="0"/>
           </a:p>
@@ -1303,7 +1392,7 @@
           <a:p>
             <a:r>
               <a:rPr lang="en-US" dirty="0"/>
-              <a:t/>
+              <a:t>The thread runs through the three sittings marked on the Section A criteria: A1, A4, EoT. A3 is the portfolio on a different rubric and sits outside this thread; its self-band lives in the L14 return.</a:t>
             </a:r>
             <a:endParaRPr lang="en-US" dirty="0"/>
           </a:p>
@@ -1931,6 +2020,383 @@
     <p:bg>
       <p:bgPr>
         <a:solidFill>
+          <a:srgbClr val="FAF8F1"/>
+        </a:solidFill>
+      </p:bgPr>
+    </p:bg>
+    <p:spTree>
+      <p:nvGrpSpPr>
+        <p:cNvPr id="1" name=""/>
+        <p:cNvGrpSpPr/>
+        <p:nvPr/>
+      </p:nvGrpSpPr>
+      <p:grpSpPr>
+        <a:xfrm>
+          <a:off x="0" y="0"/>
+          <a:ext cx="0" cy="0"/>
+          <a:chOff x="0" y="0"/>
+          <a:chExt cx="0" cy="0"/>
+        </a:xfrm>
+      </p:grpSpPr>
+      <p:sp>
+        <p:nvSpPr>
+          <p:cNvPr id="2" name="Text 0"/>
+          <p:cNvSpPr/>
+          <p:nvPr/>
+        </p:nvSpPr>
+        <p:spPr>
+          <a:xfrm>
+            <a:off x="822960" y="457200"/>
+            <a:ext cx="6400800" cy="274320"/>
+          </a:xfrm>
+          <a:prstGeom prst="rect">
+            <a:avLst/>
+          </a:prstGeom>
+          <a:noFill/>
+          <a:ln/>
+        </p:spPr>
+        <p:txBody>
+          <a:bodyPr wrap="square" lIns="0" tIns="0" rIns="0" bIns="0" rtlCol="0" anchor="ctr"/>
+          <a:lstStyle/>
+          <a:p>
+            <a:pPr algn="l" indent="0" marL="0">
+              <a:buNone/>
+            </a:pPr>
+            <a:r>
+              <a:rPr lang="en-US" sz="1100" b="1" spc="250" kern="0" dirty="0">
+                <a:solidFill>
+                  <a:srgbClr val="4A6B5D"/>
+                </a:solidFill>
+                <a:latin typeface="Arial" pitchFamily="34" charset="0"/>
+                <a:ea typeface="Arial" pitchFamily="34" charset="-122"/>
+                <a:cs typeface="Arial" pitchFamily="34" charset="-120"/>
+              </a:rPr>
+              <a:t>THE CLOSE</a:t>
+            </a:r>
+            <a:endParaRPr lang="en-US" sz="1100" dirty="0"/>
+          </a:p>
+        </p:txBody>
+      </p:sp>
+      <p:sp>
+        <p:nvSpPr>
+          <p:cNvPr id="3" name="Text 1"/>
+          <p:cNvSpPr/>
+          <p:nvPr/>
+        </p:nvSpPr>
+        <p:spPr>
+          <a:xfrm>
+            <a:off x="6793992" y="457200"/>
+            <a:ext cx="4572000" cy="274320"/>
+          </a:xfrm>
+          <a:prstGeom prst="rect">
+            <a:avLst/>
+          </a:prstGeom>
+          <a:noFill/>
+          <a:ln/>
+        </p:spPr>
+        <p:txBody>
+          <a:bodyPr wrap="square" lIns="0" tIns="0" rIns="0" bIns="0" rtlCol="0" anchor="ctr"/>
+          <a:lstStyle/>
+          <a:p>
+            <a:pPr algn="r" indent="0" marL="0">
+              <a:buNone/>
+            </a:pPr>
+            <a:r>
+              <a:rPr lang="en-US" sz="1100" b="1" spc="250" kern="0" dirty="0">
+                <a:solidFill>
+                  <a:srgbClr val="7A7F72"/>
+                </a:solidFill>
+                <a:latin typeface="Arial" pitchFamily="34" charset="0"/>
+                <a:ea typeface="Arial" pitchFamily="34" charset="-122"/>
+                <a:cs typeface="Arial" pitchFamily="34" charset="-120"/>
+              </a:rPr>
+              <a:t>SEMESTER 2, PREVIEWED HONESTLY</a:t>
+            </a:r>
+            <a:endParaRPr lang="en-US" sz="1100" dirty="0"/>
+          </a:p>
+        </p:txBody>
+      </p:sp>
+      <p:sp>
+        <p:nvSpPr>
+          <p:cNvPr id="4" name="Shape 2"/>
+          <p:cNvSpPr/>
+          <p:nvPr/>
+        </p:nvSpPr>
+        <p:spPr>
+          <a:xfrm>
+            <a:off x="822960" y="786384"/>
+            <a:ext cx="10543032" cy="0"/>
+          </a:xfrm>
+          <a:prstGeom prst="line">
+            <a:avLst/>
+          </a:prstGeom>
+          <a:noFill/>
+          <a:ln w="9525">
+            <a:solidFill>
+              <a:srgbClr val="D9D4C4"/>
+            </a:solidFill>
+            <a:prstDash val="solid"/>
+          </a:ln>
+        </p:spPr>
+      </p:sp>
+      <p:sp>
+        <p:nvSpPr>
+          <p:cNvPr id="5" name="Text 3"/>
+          <p:cNvSpPr/>
+          <p:nvPr/>
+        </p:nvSpPr>
+        <p:spPr>
+          <a:xfrm>
+            <a:off x="822960" y="1188720"/>
+            <a:ext cx="10543032" cy="822960"/>
+          </a:xfrm>
+          <a:prstGeom prst="rect">
+            <a:avLst/>
+          </a:prstGeom>
+          <a:noFill/>
+          <a:ln/>
+        </p:spPr>
+        <p:txBody>
+          <a:bodyPr wrap="square" lIns="0" tIns="0" rIns="0" bIns="0" rtlCol="0" anchor="ctr"/>
+          <a:lstStyle/>
+          <a:p>
+            <a:pPr indent="0" marL="0">
+              <a:buNone/>
+            </a:pPr>
+            <a:r>
+              <a:rPr lang="en-US" sz="3200" dirty="0">
+                <a:solidFill>
+                  <a:srgbClr val="24313F"/>
+                </a:solidFill>
+                <a:latin typeface="Georgia" pitchFamily="34" charset="0"/>
+                <a:ea typeface="Georgia" pitchFamily="34" charset="-122"/>
+                <a:cs typeface="Georgia" pitchFamily="34" charset="-120"/>
+              </a:rPr>
+              <a:t>Two living artifacts cross the break</a:t>
+            </a:r>
+            <a:endParaRPr lang="en-US" sz="3200" dirty="0"/>
+          </a:p>
+        </p:txBody>
+      </p:sp>
+      <p:sp>
+        <p:nvSpPr>
+          <p:cNvPr id="6" name="Shape 4"/>
+          <p:cNvSpPr/>
+          <p:nvPr/>
+        </p:nvSpPr>
+        <p:spPr>
+          <a:xfrm>
+            <a:off x="822960" y="2286000"/>
+            <a:ext cx="914400" cy="0"/>
+          </a:xfrm>
+          <a:prstGeom prst="line">
+            <a:avLst/>
+          </a:prstGeom>
+          <a:noFill/>
+          <a:ln w="31750">
+            <a:solidFill>
+              <a:srgbClr val="8C3A38"/>
+            </a:solidFill>
+            <a:prstDash val="solid"/>
+          </a:ln>
+        </p:spPr>
+      </p:sp>
+      <p:sp>
+        <p:nvSpPr>
+          <p:cNvPr id="7" name="Text 5"/>
+          <p:cNvSpPr/>
+          <p:nvPr/>
+        </p:nvSpPr>
+        <p:spPr>
+          <a:xfrm>
+            <a:off x="822960" y="2514600"/>
+            <a:ext cx="9875520" cy="2103120"/>
+          </a:xfrm>
+          <a:prstGeom prst="rect">
+            <a:avLst/>
+          </a:prstGeom>
+          <a:noFill/>
+          <a:ln/>
+        </p:spPr>
+        <p:txBody>
+          <a:bodyPr wrap="square" lIns="0" tIns="0" rIns="0" bIns="0" rtlCol="0" anchor="t"/>
+          <a:lstStyle/>
+          <a:p>
+            <a:pPr indent="0" marL="0">
+              <a:lnSpc>
+                <a:spcPts val="2700"/>
+              </a:lnSpc>
+              <a:buNone/>
+            </a:pPr>
+            <a:r>
+              <a:rPr lang="en-US" sz="1900" dirty="0">
+                <a:solidFill>
+                  <a:srgbClr val="24313F"/>
+                </a:solidFill>
+                <a:latin typeface="Georgia" pitchFamily="34" charset="0"/>
+                <a:ea typeface="Georgia" pitchFamily="34" charset="-122"/>
+                <a:cs typeface="Georgia" pitchFamily="34" charset="-120"/>
+              </a:rPr>
+              <a:t>First, the September wager re-run: 'I'm not impacted by media', hands up, the count recorded next to week one's. Then C1 goes to Cambridge in the spring; the film-industry case study opens Section B properly; Paper 2 sits in June. Two artifacts make the crossing: the theory-card deck built since Lesson 02, and the case-study document opened at Lesson 15. These two are the memory.</a:t>
+            </a:r>
+            <a:endParaRPr lang="en-US" sz="1900" dirty="0"/>
+          </a:p>
+        </p:txBody>
+      </p:sp>
+      <p:sp>
+        <p:nvSpPr>
+          <p:cNvPr id="8" name="Text 6"/>
+          <p:cNvSpPr/>
+          <p:nvPr/>
+        </p:nvSpPr>
+        <p:spPr>
+          <a:xfrm>
+            <a:off x="822960" y="4892040"/>
+            <a:ext cx="9875520" cy="457200"/>
+          </a:xfrm>
+          <a:prstGeom prst="rect">
+            <a:avLst/>
+          </a:prstGeom>
+          <a:noFill/>
+          <a:ln/>
+        </p:spPr>
+        <p:txBody>
+          <a:bodyPr wrap="square" lIns="0" tIns="0" rIns="0" bIns="0" rtlCol="0" anchor="ctr"/>
+          <a:lstStyle/>
+          <a:p>
+            <a:pPr indent="0" marL="0">
+              <a:buNone/>
+            </a:pPr>
+            <a:r>
+              <a:rPr lang="en-US" sz="1300" i="1" dirty="0">
+                <a:solidFill>
+                  <a:srgbClr val="7A7F72"/>
+                </a:solidFill>
+                <a:latin typeface="Arial" pitchFamily="34" charset="0"/>
+                <a:ea typeface="Arial" pitchFamily="34" charset="-122"/>
+                <a:cs typeface="Arial" pitchFamily="34" charset="-120"/>
+              </a:rPr>
+              <a:t>Grades and comments due today. The semester ends with every promise the register made, kept.</a:t>
+            </a:r>
+            <a:endParaRPr lang="en-US" sz="1300" dirty="0"/>
+          </a:p>
+        </p:txBody>
+      </p:sp>
+      <p:sp>
+        <p:nvSpPr>
+          <p:cNvPr id="9" name="Shape 7"/>
+          <p:cNvSpPr/>
+          <p:nvPr/>
+        </p:nvSpPr>
+        <p:spPr>
+          <a:xfrm>
+            <a:off x="822960" y="6382512"/>
+            <a:ext cx="10543032" cy="0"/>
+          </a:xfrm>
+          <a:prstGeom prst="line">
+            <a:avLst/>
+          </a:prstGeom>
+          <a:noFill/>
+          <a:ln w="9525">
+            <a:solidFill>
+              <a:srgbClr val="D9D4C4"/>
+            </a:solidFill>
+            <a:prstDash val="solid"/>
+          </a:ln>
+        </p:spPr>
+      </p:sp>
+      <p:sp>
+        <p:nvSpPr>
+          <p:cNvPr id="10" name="Text 8"/>
+          <p:cNvSpPr/>
+          <p:nvPr/>
+        </p:nvSpPr>
+        <p:spPr>
+          <a:xfrm>
+            <a:off x="822960" y="6419088"/>
+            <a:ext cx="7315200" cy="274320"/>
+          </a:xfrm>
+          <a:prstGeom prst="rect">
+            <a:avLst/>
+          </a:prstGeom>
+          <a:noFill/>
+          <a:ln/>
+        </p:spPr>
+        <p:txBody>
+          <a:bodyPr wrap="square" lIns="0" tIns="0" rIns="0" bIns="0" rtlCol="0" anchor="ctr"/>
+          <a:lstStyle/>
+          <a:p>
+            <a:pPr indent="0" marL="0">
+              <a:buNone/>
+            </a:pPr>
+            <a:r>
+              <a:rPr lang="en-US" sz="900" spc="150" kern="0" dirty="0">
+                <a:solidFill>
+                  <a:srgbClr val="7A7F72"/>
+                </a:solidFill>
+                <a:latin typeface="Arial" pitchFamily="34" charset="0"/>
+                <a:ea typeface="Arial" pitchFamily="34" charset="-122"/>
+                <a:cs typeface="Arial" pitchFamily="34" charset="-120"/>
+              </a:rPr>
+              <a:t>MEDIA STUDIES 9607 · SEMESTER I</a:t>
+            </a:r>
+            <a:endParaRPr lang="en-US" sz="900" dirty="0"/>
+          </a:p>
+        </p:txBody>
+      </p:sp>
+      <p:sp>
+        <p:nvSpPr>
+          <p:cNvPr id="11" name="Text 9"/>
+          <p:cNvSpPr/>
+          <p:nvPr/>
+        </p:nvSpPr>
+        <p:spPr>
+          <a:xfrm>
+            <a:off x="10268712" y="6355080"/>
+            <a:ext cx="1097280" cy="365760"/>
+          </a:xfrm>
+          <a:prstGeom prst="rect">
+            <a:avLst/>
+          </a:prstGeom>
+          <a:noFill/>
+          <a:ln/>
+        </p:spPr>
+        <p:txBody>
+          <a:bodyPr wrap="square" lIns="0" tIns="0" rIns="0" bIns="0" rtlCol="0" anchor="ctr"/>
+          <a:lstStyle/>
+          <a:p>
+            <a:pPr algn="r" indent="0" marL="0">
+              <a:buNone/>
+            </a:pPr>
+            <a:r>
+              <a:rPr lang="en-US" sz="1600" dirty="0">
+                <a:solidFill>
+                  <a:srgbClr val="A3C1AD"/>
+                </a:solidFill>
+                <a:latin typeface="Georgia" pitchFamily="34" charset="0"/>
+                <a:ea typeface="Georgia" pitchFamily="34" charset="-122"/>
+                <a:cs typeface="Georgia" pitchFamily="34" charset="-120"/>
+              </a:rPr>
+              <a:t>05</a:t>
+            </a:r>
+            <a:endParaRPr lang="en-US" sz="1600" dirty="0"/>
+          </a:p>
+        </p:txBody>
+      </p:sp>
+    </p:spTree>
+  </p:cSld>
+  <p:clrMapOvr>
+    <a:masterClrMapping/>
+  </p:clrMapOvr>
+</p:sld>
+</file>
+
+<file path=ppt/slides/slide11.xml><?xml version="1.0" encoding="utf-8"?>
+<p:sld xmlns:a="http://schemas.openxmlformats.org/drawingml/2006/main" xmlns:r="http://schemas.openxmlformats.org/officeDocument/2006/relationships" xmlns:p="http://schemas.openxmlformats.org/presentationml/2006/main">
+  <p:cSld name="Slide 11">
+    <p:bg>
+      <p:bgPr>
+        <a:solidFill>
           <a:srgbClr val="4A6B5D"/>
         </a:solidFill>
       </p:bgPr>
@@ -2246,7 +2712,7 @@
                 <a:ea typeface="Georgia" pitchFamily="34" charset="-122"/>
                 <a:cs typeface="Georgia" pitchFamily="34" charset="-120"/>
               </a:rPr>
-              <a:t>05</a:t>
+              <a:t>06</a:t>
             </a:r>
             <a:endParaRPr lang="en-US" sz="1600" dirty="0"/>
           </a:p>
@@ -2588,8 +3054,8 @@
         </p:nvSpPr>
         <p:spPr>
           <a:xfrm>
-            <a:off x="822960" y="1280160"/>
-            <a:ext cx="10543032" cy="914400"/>
+            <a:off x="822960" y="1051560"/>
+            <a:ext cx="6583680" cy="822960"/>
           </a:xfrm>
           <a:prstGeom prst="rect">
             <a:avLst/>
@@ -2605,7 +3071,7 @@
               <a:buNone/>
             </a:pPr>
             <a:r>
-              <a:rPr lang="en-US" sz="3800" dirty="0">
+              <a:rPr lang="en-US" sz="3400" dirty="0">
                 <a:solidFill>
                   <a:srgbClr val="24313F"/>
                 </a:solidFill>
@@ -2615,7 +3081,7 @@
               </a:rPr>
               <a:t>Two hours, the real thing</a:t>
             </a:r>
-            <a:endParaRPr lang="en-US" sz="3800" dirty="0"/>
+            <a:endParaRPr lang="en-US" sz="3400" dirty="0"/>
           </a:p>
         </p:txBody>
       </p:sp>
@@ -2627,7 +3093,7 @@
         </p:nvSpPr>
         <p:spPr>
           <a:xfrm>
-            <a:off x="822960" y="2514600"/>
+            <a:off x="822960" y="2103120"/>
             <a:ext cx="914400" cy="0"/>
           </a:xfrm>
           <a:prstGeom prst="line">
@@ -2650,8 +3116,8 @@
         </p:nvSpPr>
         <p:spPr>
           <a:xfrm>
-            <a:off x="822960" y="2743200"/>
-            <a:ext cx="9875520" cy="2011680"/>
+            <a:off x="822960" y="2331720"/>
+            <a:ext cx="6492240" cy="2377440"/>
           </a:xfrm>
           <a:prstGeom prst="rect">
             <a:avLst/>
@@ -2665,12 +3131,12 @@
           <a:p>
             <a:pPr indent="0" marL="0">
               <a:lnSpc>
-                <a:spcPts val="2800"/>
+                <a:spcPts val="2500"/>
               </a:lnSpc>
               <a:buNone/>
             </a:pPr>
             <a:r>
-              <a:rPr lang="en-US" sz="2000" dirty="0">
+              <a:rPr lang="en-US" sz="1750" dirty="0">
                 <a:solidFill>
                   <a:srgbClr val="24313F"/>
                 </a:solidFill>
@@ -2680,7 +3146,7 @@
               </a:rPr>
               <a:t>The full Component 2 paper, two hours, exam venue, full conditions: Section A on the unseen extract, thirty minutes of viewing and notes plus forty-five writing, then Section B from the contexts menu. The one logistical item that cannot be improvised is the screening: facilities for Section A are booked in advance.</a:t>
             </a:r>
-            <a:endParaRPr lang="en-US" sz="2000" dirty="0"/>
+            <a:endParaRPr lang="en-US" sz="1750" dirty="0"/>
           </a:p>
         </p:txBody>
       </p:sp>
@@ -2692,24 +3158,27 @@
         </p:nvSpPr>
         <p:spPr>
           <a:xfrm>
-            <a:off x="822960" y="4937760"/>
-            <a:ext cx="9875520" cy="457200"/>
-          </a:xfrm>
-          <a:prstGeom prst="rect">
-            <a:avLst/>
-          </a:prstGeom>
-          <a:noFill/>
-          <a:ln/>
-        </p:spPr>
-        <p:txBody>
-          <a:bodyPr wrap="square" lIns="0" tIns="0" rIns="0" bIns="0" rtlCol="0" anchor="ctr"/>
+            <a:off x="822960" y="5029200"/>
+            <a:ext cx="6492240" cy="640080"/>
+          </a:xfrm>
+          <a:prstGeom prst="rect">
+            <a:avLst/>
+          </a:prstGeom>
+          <a:noFill/>
+          <a:ln/>
+        </p:spPr>
+        <p:txBody>
+          <a:bodyPr wrap="square" lIns="0" tIns="0" rIns="0" bIns="0" rtlCol="0" anchor="t"/>
           <a:lstStyle/>
           <a:p>
             <a:pPr indent="0" marL="0">
-              <a:buNone/>
-            </a:pPr>
-            <a:r>
-              <a:rPr lang="en-US" sz="1300" i="1" dirty="0">
+              <a:lnSpc>
+                <a:spcPts val="1700"/>
+              </a:lnSpc>
+              <a:buNone/>
+            </a:pPr>
+            <a:r>
+              <a:rPr lang="en-US" sz="1250" i="1" dirty="0">
                 <a:solidFill>
                   <a:srgbClr val="7A7F72"/>
                 </a:solidFill>
@@ -2719,7 +3188,7 @@
               </a:rPr>
               <a:t>The exam is an assessment event inside the lesson, not a taught day, per the counting convention.</a:t>
             </a:r>
-            <a:endParaRPr lang="en-US" sz="1300" dirty="0"/>
+            <a:endParaRPr lang="en-US" sz="1250" dirty="0"/>
           </a:p>
         </p:txBody>
       </p:sp>
@@ -2731,13 +3200,15 @@
         </p:nvSpPr>
         <p:spPr>
           <a:xfrm>
-            <a:off x="822960" y="6382512"/>
-            <a:ext cx="10543032" cy="0"/>
-          </a:xfrm>
-          <a:prstGeom prst="line">
-            <a:avLst/>
-          </a:prstGeom>
-          <a:noFill/>
+            <a:off x="7498080" y="1097280"/>
+            <a:ext cx="3886200" cy="4663440"/>
+          </a:xfrm>
+          <a:prstGeom prst="rect">
+            <a:avLst/>
+          </a:prstGeom>
+          <a:solidFill>
+            <a:srgbClr val="FAF8F1"/>
+          </a:solidFill>
           <a:ln w="9525">
             <a:solidFill>
               <a:srgbClr val="D9D4C4"/>
@@ -2746,16 +3217,40 @@
           </a:ln>
         </p:spPr>
       </p:sp>
-      <p:sp>
-        <p:nvSpPr>
-          <p:cNvPr id="10" name="Text 8"/>
-          <p:cNvSpPr/>
-          <p:nvPr/>
-        </p:nvSpPr>
-        <p:spPr>
-          <a:xfrm>
-            <a:off x="822960" y="6419088"/>
-            <a:ext cx="7315200" cy="274320"/>
+      <p:pic>
+        <p:nvPicPr>
+          <p:cNvPr id="10" name="Image 0" descr="/Users/dogan/Documents/Vaults/Courses/wiki/classes/media-studies/decks/_build/img/qp21-cover.jpg">    </p:cNvPr>
+          <p:cNvPicPr>
+            <a:picLocks noChangeAspect="1"/>
+          </p:cNvPicPr>
+          <p:nvPr/>
+        </p:nvPicPr>
+        <p:blipFill>
+          <a:blip r:embed="rId1"/>
+          <a:stretch>
+            <a:fillRect/>
+          </a:stretch>
+        </p:blipFill>
+        <p:spPr>
+          <a:xfrm>
+            <a:off x="7882853" y="1225296"/>
+            <a:ext cx="3116654" cy="4407408"/>
+          </a:xfrm>
+          <a:prstGeom prst="rect">
+            <a:avLst/>
+          </a:prstGeom>
+        </p:spPr>
+      </p:pic>
+      <p:sp>
+        <p:nvSpPr>
+          <p:cNvPr id="11" name="Text 8"/>
+          <p:cNvSpPr/>
+          <p:nvPr/>
+        </p:nvSpPr>
+        <p:spPr>
+          <a:xfrm>
+            <a:off x="7498080" y="5806440"/>
+            <a:ext cx="3886200" cy="320040"/>
           </a:xfrm>
           <a:prstGeom prst="rect">
             <a:avLst/>
@@ -2767,11 +3262,11 @@
           <a:bodyPr wrap="square" lIns="0" tIns="0" rIns="0" bIns="0" rtlCol="0" anchor="ctr"/>
           <a:lstStyle/>
           <a:p>
-            <a:pPr indent="0" marL="0">
-              <a:buNone/>
-            </a:pPr>
-            <a:r>
-              <a:rPr lang="en-US" sz="900" spc="150" kern="0" dirty="0">
+            <a:pPr algn="ctr" indent="0" marL="0">
+              <a:buNone/>
+            </a:pPr>
+            <a:r>
+              <a:rPr lang="en-US" sz="1000" dirty="0">
                 <a:solidFill>
                   <a:srgbClr val="7A7F72"/>
                 </a:solidFill>
@@ -2779,6 +3274,68 @@
                 <a:ea typeface="Arial" pitchFamily="34" charset="-122"/>
                 <a:cs typeface="Arial" pitchFamily="34" charset="-120"/>
               </a:rPr>
+              <a:t>What the paper looks like (the June 2024 cover; yours differs only in date)</a:t>
+            </a:r>
+            <a:endParaRPr lang="en-US" sz="1000" dirty="0"/>
+          </a:p>
+        </p:txBody>
+      </p:sp>
+      <p:sp>
+        <p:nvSpPr>
+          <p:cNvPr id="12" name="Shape 9"/>
+          <p:cNvSpPr/>
+          <p:nvPr/>
+        </p:nvSpPr>
+        <p:spPr>
+          <a:xfrm>
+            <a:off x="822960" y="6382512"/>
+            <a:ext cx="10543032" cy="0"/>
+          </a:xfrm>
+          <a:prstGeom prst="line">
+            <a:avLst/>
+          </a:prstGeom>
+          <a:noFill/>
+          <a:ln w="9525">
+            <a:solidFill>
+              <a:srgbClr val="D9D4C4"/>
+            </a:solidFill>
+            <a:prstDash val="solid"/>
+          </a:ln>
+        </p:spPr>
+      </p:sp>
+      <p:sp>
+        <p:nvSpPr>
+          <p:cNvPr id="13" name="Text 10"/>
+          <p:cNvSpPr/>
+          <p:nvPr/>
+        </p:nvSpPr>
+        <p:spPr>
+          <a:xfrm>
+            <a:off x="822960" y="6419088"/>
+            <a:ext cx="7315200" cy="274320"/>
+          </a:xfrm>
+          <a:prstGeom prst="rect">
+            <a:avLst/>
+          </a:prstGeom>
+          <a:noFill/>
+          <a:ln/>
+        </p:spPr>
+        <p:txBody>
+          <a:bodyPr wrap="square" lIns="0" tIns="0" rIns="0" bIns="0" rtlCol="0" anchor="ctr"/>
+          <a:lstStyle/>
+          <a:p>
+            <a:pPr indent="0" marL="0">
+              <a:buNone/>
+            </a:pPr>
+            <a:r>
+              <a:rPr lang="en-US" sz="900" spc="150" kern="0" dirty="0">
+                <a:solidFill>
+                  <a:srgbClr val="7A7F72"/>
+                </a:solidFill>
+                <a:latin typeface="Arial" pitchFamily="34" charset="0"/>
+                <a:ea typeface="Arial" pitchFamily="34" charset="-122"/>
+                <a:cs typeface="Arial" pitchFamily="34" charset="-120"/>
+              </a:rPr>
               <a:t>MEDIA STUDIES 9607 · SEMESTER I</a:t>
             </a:r>
             <a:endParaRPr lang="en-US" sz="900" dirty="0"/>
@@ -2787,7 +3344,7 @@
       </p:sp>
       <p:sp>
         <p:nvSpPr>
-          <p:cNvPr id="11" name="Text 9"/>
+          <p:cNvPr id="14" name="Text 11"/>
           <p:cNvSpPr/>
           <p:nvPr/>
         </p:nvSpPr>
@@ -2835,6 +3392,238 @@
 <file path=ppt/slides/slide4.xml><?xml version="1.0" encoding="utf-8"?>
 <p:sld xmlns:a="http://schemas.openxmlformats.org/drawingml/2006/main" xmlns:r="http://schemas.openxmlformats.org/officeDocument/2006/relationships" xmlns:p="http://schemas.openxmlformats.org/presentationml/2006/main">
   <p:cSld name="Slide 4">
+    <p:spTree>
+      <p:nvGrpSpPr>
+        <p:cNvPr id="1" name=""/>
+        <p:cNvGrpSpPr/>
+        <p:nvPr/>
+      </p:nvGrpSpPr>
+      <p:grpSpPr>
+        <a:xfrm>
+          <a:off x="0" y="0"/>
+          <a:ext cx="0" cy="0"/>
+          <a:chOff x="0" y="0"/>
+          <a:chExt cx="0" cy="0"/>
+        </a:xfrm>
+      </p:grpSpPr>
+      <p:pic>
+        <p:nvPicPr>
+          <p:cNvPr id="2" name="Image 0" descr="/Users/dogan/Documents/Vaults/Courses/wiki/classes/media-studies/decks/_build/img/crops/monet-magpie_a1777.jpg">    </p:cNvPr>
+          <p:cNvPicPr>
+            <a:picLocks noChangeAspect="1"/>
+          </p:cNvPicPr>
+          <p:nvPr/>
+        </p:nvPicPr>
+        <p:blipFill>
+          <a:blip r:embed="rId1"/>
+          <a:stretch>
+            <a:fillRect/>
+          </a:stretch>
+        </p:blipFill>
+        <p:spPr>
+          <a:xfrm>
+            <a:off x="0" y="0"/>
+            <a:ext cx="12188952" cy="6858000"/>
+          </a:xfrm>
+          <a:prstGeom prst="rect">
+            <a:avLst/>
+          </a:prstGeom>
+        </p:spPr>
+      </p:pic>
+      <p:sp>
+        <p:nvSpPr>
+          <p:cNvPr id="3" name="Shape 0"/>
+          <p:cNvSpPr/>
+          <p:nvPr/>
+        </p:nvSpPr>
+        <p:spPr>
+          <a:xfrm>
+            <a:off x="502920" y="502920"/>
+            <a:ext cx="5120640" cy="502920"/>
+          </a:xfrm>
+          <a:prstGeom prst="rect">
+            <a:avLst/>
+          </a:prstGeom>
+          <a:solidFill>
+            <a:srgbClr val="FAF8F1"/>
+          </a:solidFill>
+          <a:ln/>
+        </p:spPr>
+      </p:sp>
+      <p:sp>
+        <p:nvSpPr>
+          <p:cNvPr id="4" name="Text 1"/>
+          <p:cNvSpPr/>
+          <p:nvPr/>
+        </p:nvSpPr>
+        <p:spPr>
+          <a:xfrm>
+            <a:off x="704088" y="521208"/>
+            <a:ext cx="4846320" cy="274320"/>
+          </a:xfrm>
+          <a:prstGeom prst="rect">
+            <a:avLst/>
+          </a:prstGeom>
+          <a:noFill/>
+          <a:ln/>
+        </p:spPr>
+        <p:txBody>
+          <a:bodyPr wrap="square" lIns="0" tIns="0" rIns="0" bIns="0" rtlCol="0" anchor="ctr"/>
+          <a:lstStyle/>
+          <a:p>
+            <a:pPr algn="l" indent="0" marL="0">
+              <a:buNone/>
+            </a:pPr>
+            <a:r>
+              <a:rPr lang="en-US" sz="1100" b="1" spc="250" kern="0" dirty="0">
+                <a:solidFill>
+                  <a:srgbClr val="4A6B5D"/>
+                </a:solidFill>
+                <a:latin typeface="Arial" pitchFamily="34" charset="0"/>
+                <a:ea typeface="Arial" pitchFamily="34" charset="-122"/>
+                <a:cs typeface="Arial" pitchFamily="34" charset="-120"/>
+              </a:rPr>
+              <a:t>THE WORK IS DONE AND SAT</a:t>
+            </a:r>
+            <a:endParaRPr lang="en-US" sz="1100" dirty="0"/>
+          </a:p>
+        </p:txBody>
+      </p:sp>
+      <p:sp>
+        <p:nvSpPr>
+          <p:cNvPr id="5" name="Shape 2"/>
+          <p:cNvSpPr/>
+          <p:nvPr/>
+        </p:nvSpPr>
+        <p:spPr>
+          <a:xfrm>
+            <a:off x="457200" y="5230368"/>
+            <a:ext cx="8778240" cy="1243584"/>
+          </a:xfrm>
+          <a:prstGeom prst="rect">
+            <a:avLst/>
+          </a:prstGeom>
+          <a:solidFill>
+            <a:srgbClr val="FAF8F1"/>
+          </a:solidFill>
+          <a:ln/>
+        </p:spPr>
+      </p:sp>
+      <p:sp>
+        <p:nvSpPr>
+          <p:cNvPr id="6" name="Shape 3"/>
+          <p:cNvSpPr/>
+          <p:nvPr/>
+        </p:nvSpPr>
+        <p:spPr>
+          <a:xfrm>
+            <a:off x="676656" y="5468112"/>
+            <a:ext cx="731520" cy="0"/>
+          </a:xfrm>
+          <a:prstGeom prst="line">
+            <a:avLst/>
+          </a:prstGeom>
+          <a:noFill/>
+          <a:ln w="28575">
+            <a:solidFill>
+              <a:srgbClr val="8C3A38"/>
+            </a:solidFill>
+            <a:prstDash val="solid"/>
+          </a:ln>
+        </p:spPr>
+      </p:sp>
+      <p:sp>
+        <p:nvSpPr>
+          <p:cNvPr id="7" name="Text 4"/>
+          <p:cNvSpPr/>
+          <p:nvPr/>
+        </p:nvSpPr>
+        <p:spPr>
+          <a:xfrm>
+            <a:off x="676656" y="5541264"/>
+            <a:ext cx="8339328" cy="585216"/>
+          </a:xfrm>
+          <a:prstGeom prst="rect">
+            <a:avLst/>
+          </a:prstGeom>
+          <a:noFill/>
+          <a:ln/>
+        </p:spPr>
+        <p:txBody>
+          <a:bodyPr wrap="square" lIns="0" tIns="0" rIns="0" bIns="0" rtlCol="0" anchor="t"/>
+          <a:lstStyle/>
+          <a:p>
+            <a:pPr indent="0" marL="0">
+              <a:lnSpc>
+                <a:spcPts val="2200"/>
+              </a:lnSpc>
+              <a:buNone/>
+            </a:pPr>
+            <a:r>
+              <a:rPr lang="en-US" sz="1800" dirty="0">
+                <a:solidFill>
+                  <a:srgbClr val="24313F"/>
+                </a:solidFill>
+                <a:latin typeface="Georgia" pitchFamily="34" charset="0"/>
+                <a:ea typeface="Georgia" pitchFamily="34" charset="-122"/>
+                <a:cs typeface="Georgia" pitchFamily="34" charset="-120"/>
+              </a:rPr>
+              <a:t>The paper is written. What is left is the reading of what it says about the term.</a:t>
+            </a:r>
+            <a:endParaRPr lang="en-US" sz="1800" dirty="0"/>
+          </a:p>
+        </p:txBody>
+      </p:sp>
+      <p:sp>
+        <p:nvSpPr>
+          <p:cNvPr id="8" name="Text 5"/>
+          <p:cNvSpPr/>
+          <p:nvPr/>
+        </p:nvSpPr>
+        <p:spPr>
+          <a:xfrm>
+            <a:off x="676656" y="6181344"/>
+            <a:ext cx="8339328" cy="256032"/>
+          </a:xfrm>
+          <a:prstGeom prst="rect">
+            <a:avLst/>
+          </a:prstGeom>
+          <a:noFill/>
+          <a:ln/>
+        </p:spPr>
+        <p:txBody>
+          <a:bodyPr wrap="square" lIns="0" tIns="0" rIns="0" bIns="0" rtlCol="0" anchor="ctr"/>
+          <a:lstStyle/>
+          <a:p>
+            <a:pPr indent="0" marL="0">
+              <a:buNone/>
+            </a:pPr>
+            <a:r>
+              <a:rPr lang="en-US" sz="950" spc="50" kern="0" dirty="0">
+                <a:solidFill>
+                  <a:srgbClr val="7A7F72"/>
+                </a:solidFill>
+                <a:latin typeface="Arial" pitchFamily="34" charset="0"/>
+                <a:ea typeface="Arial" pitchFamily="34" charset="-122"/>
+                <a:cs typeface="Arial" pitchFamily="34" charset="-120"/>
+              </a:rPr>
+              <a:t>Claude Monet, The Magpie, 1869</a:t>
+            </a:r>
+            <a:endParaRPr lang="en-US" sz="950" dirty="0"/>
+          </a:p>
+        </p:txBody>
+      </p:sp>
+    </p:spTree>
+  </p:cSld>
+  <p:clrMapOvr>
+    <a:masterClrMapping/>
+  </p:clrMapOvr>
+</p:sld>
+</file>
+
+<file path=ppt/slides/slide5.xml><?xml version="1.0" encoding="utf-8"?>
+<p:sld xmlns:a="http://schemas.openxmlformats.org/drawingml/2006/main" xmlns:r="http://schemas.openxmlformats.org/officeDocument/2006/relationships" xmlns:p="http://schemas.openxmlformats.org/presentationml/2006/main">
+  <p:cSld name="Slide 5">
     <p:bg>
       <p:bgPr>
         <a:solidFill>
@@ -2965,8 +3754,8 @@
         </p:nvSpPr>
         <p:spPr>
           <a:xfrm>
-            <a:off x="822960" y="1005840"/>
-            <a:ext cx="10543032" cy="731520"/>
+            <a:off x="822960" y="960120"/>
+            <a:ext cx="6766560" cy="640080"/>
           </a:xfrm>
           <a:prstGeom prst="rect">
             <a:avLst/>
@@ -2982,7 +3771,7 @@
               <a:buNone/>
             </a:pPr>
             <a:r>
-              <a:rPr lang="en-US" sz="3600" dirty="0">
+              <a:rPr lang="en-US" sz="3200" dirty="0">
                 <a:solidFill>
                   <a:srgbClr val="24313F"/>
                 </a:solidFill>
@@ -2992,7 +3781,7 @@
               </a:rPr>
               <a:t>The mark, then the gap</a:t>
             </a:r>
-            <a:endParaRPr lang="en-US" sz="3600" dirty="0"/>
+            <a:endParaRPr lang="en-US" sz="3200" dirty="0"/>
           </a:p>
         </p:txBody>
       </p:sp>
@@ -3004,8 +3793,8 @@
         </p:nvSpPr>
         <p:spPr>
           <a:xfrm>
-            <a:off x="822960" y="2011680"/>
-            <a:ext cx="4846320" cy="502920"/>
+            <a:off x="822960" y="1783080"/>
+            <a:ext cx="6675120" cy="457200"/>
           </a:xfrm>
           <a:prstGeom prst="rect">
             <a:avLst/>
@@ -3021,7 +3810,7 @@
               <a:buNone/>
             </a:pPr>
             <a:r>
-              <a:rPr lang="en-US" sz="2200" dirty="0">
+              <a:rPr lang="en-US" sz="2000" dirty="0">
                 <a:solidFill>
                   <a:srgbClr val="4A6B5D"/>
                 </a:solidFill>
@@ -3031,7 +3820,7 @@
               </a:rPr>
               <a:t>Self-band from memory</a:t>
             </a:r>
-            <a:endParaRPr lang="en-US" sz="2200" dirty="0"/>
+            <a:endParaRPr lang="en-US" sz="2000" dirty="0"/>
           </a:p>
         </p:txBody>
       </p:sp>
@@ -3043,8 +3832,8 @@
         </p:nvSpPr>
         <p:spPr>
           <a:xfrm>
-            <a:off x="822960" y="2560320"/>
-            <a:ext cx="4754880" cy="0"/>
+            <a:off x="822960" y="2286000"/>
+            <a:ext cx="6583680" cy="0"/>
           </a:xfrm>
           <a:prstGeom prst="line">
             <a:avLst/>
@@ -3066,8 +3855,8 @@
         </p:nvSpPr>
         <p:spPr>
           <a:xfrm>
-            <a:off x="822960" y="2697480"/>
-            <a:ext cx="4846320" cy="2377440"/>
+            <a:off x="822960" y="2404872"/>
+            <a:ext cx="6675120" cy="1280160"/>
           </a:xfrm>
           <a:prstGeom prst="rect">
             <a:avLst/>
@@ -3081,12 +3870,12 @@
           <a:p>
             <a:pPr indent="0" marL="0">
               <a:lnSpc>
-                <a:spcPts val="2300"/>
+                <a:spcPts val="2100"/>
               </a:lnSpc>
               <a:buNone/>
             </a:pPr>
             <a:r>
-              <a:rPr lang="en-US" sz="1650" dirty="0">
+              <a:rPr lang="en-US" sz="1500" dirty="0">
                 <a:solidFill>
                   <a:srgbClr val="24313F"/>
                 </a:solidFill>
@@ -3096,7 +3885,7 @@
               </a:rPr>
               <a:t>Scripts face-down; band yourself per criterion from memory of what you wrote, then see the mark. The gap is now a familiar number.</a:t>
             </a:r>
-            <a:endParaRPr lang="en-US" sz="1650" dirty="0"/>
+            <a:endParaRPr lang="en-US" sz="1500" dirty="0"/>
           </a:p>
         </p:txBody>
       </p:sp>
@@ -3108,8 +3897,8 @@
         </p:nvSpPr>
         <p:spPr>
           <a:xfrm>
-            <a:off x="6309360" y="2011680"/>
-            <a:ext cx="4846320" cy="502920"/>
+            <a:off x="822960" y="3886200"/>
+            <a:ext cx="6675120" cy="457200"/>
           </a:xfrm>
           <a:prstGeom prst="rect">
             <a:avLst/>
@@ -3125,7 +3914,7 @@
               <a:buNone/>
             </a:pPr>
             <a:r>
-              <a:rPr lang="en-US" sz="2200" dirty="0">
+              <a:rPr lang="en-US" sz="2000" dirty="0">
                 <a:solidFill>
                   <a:srgbClr val="5C7A6B"/>
                 </a:solidFill>
@@ -3135,7 +3924,7 @@
               </a:rPr>
               <a:t>Gaps in AO language</a:t>
             </a:r>
-            <a:endParaRPr lang="en-US" sz="2200" dirty="0"/>
+            <a:endParaRPr lang="en-US" sz="2000" dirty="0"/>
           </a:p>
         </p:txBody>
       </p:sp>
@@ -3147,8 +3936,8 @@
         </p:nvSpPr>
         <p:spPr>
           <a:xfrm>
-            <a:off x="6309360" y="2560320"/>
-            <a:ext cx="4754880" cy="0"/>
+            <a:off x="822960" y="4389120"/>
+            <a:ext cx="6583680" cy="0"/>
           </a:xfrm>
           <a:prstGeom prst="line">
             <a:avLst/>
@@ -3170,8 +3959,8 @@
         </p:nvSpPr>
         <p:spPr>
           <a:xfrm>
-            <a:off x="6309360" y="2697480"/>
-            <a:ext cx="4846320" cy="2377440"/>
+            <a:off x="822960" y="4507992"/>
+            <a:ext cx="6675120" cy="1280160"/>
           </a:xfrm>
           <a:prstGeom prst="rect">
             <a:avLst/>
@@ -3185,12 +3974,12 @@
           <a:p>
             <a:pPr indent="0" marL="0">
               <a:lnSpc>
-                <a:spcPts val="2300"/>
+                <a:spcPts val="2100"/>
               </a:lnSpc>
               <a:buNone/>
             </a:pPr>
             <a:r>
-              <a:rPr lang="en-US" sz="1650" dirty="0">
+              <a:rPr lang="en-US" sz="1500" dirty="0">
                 <a:solidFill>
                   <a:srgbClr val="24313F"/>
                 </a:solidFill>
@@ -3200,7 +3989,7 @@
               </a:rPr>
               <a:t>Name your gaps in writing, in AO language, with the script as evidence: not Section B went badly, but AO1 contexts, my case-study facts were pre-2020.</a:t>
             </a:r>
-            <a:endParaRPr lang="en-US" sz="1650" dirty="0"/>
+            <a:endParaRPr lang="en-US" sz="1500" dirty="0"/>
           </a:p>
         </p:txBody>
       </p:sp>
@@ -3212,13 +4001,15 @@
         </p:nvSpPr>
         <p:spPr>
           <a:xfrm>
-            <a:off x="822960" y="6382512"/>
-            <a:ext cx="10543032" cy="0"/>
-          </a:xfrm>
-          <a:prstGeom prst="line">
-            <a:avLst/>
-          </a:prstGeom>
-          <a:noFill/>
+            <a:off x="7452360" y="1234440"/>
+            <a:ext cx="3931920" cy="3977640"/>
+          </a:xfrm>
+          <a:prstGeom prst="rect">
+            <a:avLst/>
+          </a:prstGeom>
+          <a:solidFill>
+            <a:srgbClr val="FAF8F1"/>
+          </a:solidFill>
           <a:ln w="9525">
             <a:solidFill>
               <a:srgbClr val="D9D4C4"/>
@@ -3227,32 +4018,59 @@
           </a:ln>
         </p:spPr>
       </p:sp>
-      <p:sp>
-        <p:nvSpPr>
-          <p:cNvPr id="13" name="Text 11"/>
-          <p:cNvSpPr/>
-          <p:nvPr/>
-        </p:nvSpPr>
-        <p:spPr>
-          <a:xfrm>
-            <a:off x="822960" y="6419088"/>
-            <a:ext cx="7315200" cy="274320"/>
-          </a:xfrm>
-          <a:prstGeom prst="rect">
-            <a:avLst/>
-          </a:prstGeom>
-          <a:noFill/>
-          <a:ln/>
-        </p:spPr>
-        <p:txBody>
-          <a:bodyPr wrap="square" lIns="0" tIns="0" rIns="0" bIns="0" rtlCol="0" anchor="ctr"/>
-          <a:lstStyle/>
-          <a:p>
-            <a:pPr indent="0" marL="0">
-              <a:buNone/>
-            </a:pPr>
-            <a:r>
-              <a:rPr lang="en-US" sz="900" spc="150" kern="0" dirty="0">
+      <p:pic>
+        <p:nvPicPr>
+          <p:cNvPr id="13" name="Image 0" descr="/Users/dogan/Documents/Vaults/Courses/wiki/classes/media-studies/decks/_build/img/ws46.jpg">    </p:cNvPr>
+          <p:cNvPicPr>
+            <a:picLocks noChangeAspect="1"/>
+          </p:cNvPicPr>
+          <p:nvPr/>
+        </p:nvPicPr>
+        <p:blipFill>
+          <a:blip r:embed="rId1"/>
+          <a:stretch>
+            <a:fillRect/>
+          </a:stretch>
+        </p:blipFill>
+        <p:spPr>
+          <a:xfrm>
+            <a:off x="7580376" y="1924362"/>
+            <a:ext cx="3675888" cy="2597795"/>
+          </a:xfrm>
+          <a:prstGeom prst="rect">
+            <a:avLst/>
+          </a:prstGeom>
+        </p:spPr>
+      </p:pic>
+      <p:sp>
+        <p:nvSpPr>
+          <p:cNvPr id="14" name="Text 11"/>
+          <p:cNvSpPr/>
+          <p:nvPr/>
+        </p:nvSpPr>
+        <p:spPr>
+          <a:xfrm>
+            <a:off x="7452360" y="5257800"/>
+            <a:ext cx="3931920" cy="457200"/>
+          </a:xfrm>
+          <a:prstGeom prst="rect">
+            <a:avLst/>
+          </a:prstGeom>
+          <a:noFill/>
+          <a:ln/>
+        </p:spPr>
+        <p:txBody>
+          <a:bodyPr wrap="square" lIns="0" tIns="0" rIns="0" bIns="0" rtlCol="0" anchor="t"/>
+          <a:lstStyle/>
+          <a:p>
+            <a:pPr algn="ctr" indent="0" marL="0">
+              <a:lnSpc>
+                <a:spcPts val="1300"/>
+              </a:lnSpc>
+              <a:buNone/>
+            </a:pPr>
+            <a:r>
+              <a:rPr lang="en-US" sz="1000" dirty="0">
                 <a:solidFill>
                   <a:srgbClr val="7A7F72"/>
                 </a:solidFill>
@@ -3260,6 +4078,68 @@
                 <a:ea typeface="Arial" pitchFamily="34" charset="-122"/>
                 <a:cs typeface="Arial" pitchFamily="34" charset="-120"/>
               </a:rPr>
+              <a:t>WS 4.6: the instrument behind every per-criterion breakdown handed back today</a:t>
+            </a:r>
+            <a:endParaRPr lang="en-US" sz="1000" dirty="0"/>
+          </a:p>
+        </p:txBody>
+      </p:sp>
+      <p:sp>
+        <p:nvSpPr>
+          <p:cNvPr id="15" name="Shape 12"/>
+          <p:cNvSpPr/>
+          <p:nvPr/>
+        </p:nvSpPr>
+        <p:spPr>
+          <a:xfrm>
+            <a:off x="822960" y="6382512"/>
+            <a:ext cx="10543032" cy="0"/>
+          </a:xfrm>
+          <a:prstGeom prst="line">
+            <a:avLst/>
+          </a:prstGeom>
+          <a:noFill/>
+          <a:ln w="9525">
+            <a:solidFill>
+              <a:srgbClr val="D9D4C4"/>
+            </a:solidFill>
+            <a:prstDash val="solid"/>
+          </a:ln>
+        </p:spPr>
+      </p:sp>
+      <p:sp>
+        <p:nvSpPr>
+          <p:cNvPr id="16" name="Text 13"/>
+          <p:cNvSpPr/>
+          <p:nvPr/>
+        </p:nvSpPr>
+        <p:spPr>
+          <a:xfrm>
+            <a:off x="822960" y="6419088"/>
+            <a:ext cx="7315200" cy="274320"/>
+          </a:xfrm>
+          <a:prstGeom prst="rect">
+            <a:avLst/>
+          </a:prstGeom>
+          <a:noFill/>
+          <a:ln/>
+        </p:spPr>
+        <p:txBody>
+          <a:bodyPr wrap="square" lIns="0" tIns="0" rIns="0" bIns="0" rtlCol="0" anchor="ctr"/>
+          <a:lstStyle/>
+          <a:p>
+            <a:pPr indent="0" marL="0">
+              <a:buNone/>
+            </a:pPr>
+            <a:r>
+              <a:rPr lang="en-US" sz="900" spc="150" kern="0" dirty="0">
+                <a:solidFill>
+                  <a:srgbClr val="7A7F72"/>
+                </a:solidFill>
+                <a:latin typeface="Arial" pitchFamily="34" charset="0"/>
+                <a:ea typeface="Arial" pitchFamily="34" charset="-122"/>
+                <a:cs typeface="Arial" pitchFamily="34" charset="-120"/>
+              </a:rPr>
               <a:t>MEDIA STUDIES 9607 · SEMESTER I</a:t>
             </a:r>
             <a:endParaRPr lang="en-US" sz="900" dirty="0"/>
@@ -3268,7 +4148,7 @@
       </p:sp>
       <p:sp>
         <p:nvSpPr>
-          <p:cNvPr id="14" name="Text 12"/>
+          <p:cNvPr id="17" name="Text 14"/>
           <p:cNvSpPr/>
           <p:nvPr/>
         </p:nvSpPr>
@@ -3313,9 +4193,9 @@
 </p:sld>
 </file>
 
-<file path=ppt/slides/slide5.xml><?xml version="1.0" encoding="utf-8"?>
+<file path=ppt/slides/slide6.xml><?xml version="1.0" encoding="utf-8"?>
 <p:sld xmlns:a="http://schemas.openxmlformats.org/drawingml/2006/main" xmlns:r="http://schemas.openxmlformats.org/officeDocument/2006/relationships" xmlns:p="http://schemas.openxmlformats.org/presentationml/2006/main">
-  <p:cSld name="Slide 5">
+  <p:cSld name="Slide 6">
     <p:bg>
       <p:bgPr>
         <a:solidFill>
@@ -3477,238 +4357,6 @@
               <a:t>T. S. Eliot, Little Gidding, 1942</a:t>
             </a:r>
             <a:endParaRPr lang="en-US" sz="1400" dirty="0"/>
-          </a:p>
-        </p:txBody>
-      </p:sp>
-    </p:spTree>
-  </p:cSld>
-  <p:clrMapOvr>
-    <a:masterClrMapping/>
-  </p:clrMapOvr>
-</p:sld>
-</file>
-
-<file path=ppt/slides/slide6.xml><?xml version="1.0" encoding="utf-8"?>
-<p:sld xmlns:a="http://schemas.openxmlformats.org/drawingml/2006/main" xmlns:r="http://schemas.openxmlformats.org/officeDocument/2006/relationships" xmlns:p="http://schemas.openxmlformats.org/presentationml/2006/main">
-  <p:cSld name="Slide 6">
-    <p:spTree>
-      <p:nvGrpSpPr>
-        <p:cNvPr id="1" name=""/>
-        <p:cNvGrpSpPr/>
-        <p:nvPr/>
-      </p:nvGrpSpPr>
-      <p:grpSpPr>
-        <a:xfrm>
-          <a:off x="0" y="0"/>
-          <a:ext cx="0" cy="0"/>
-          <a:chOff x="0" y="0"/>
-          <a:chExt cx="0" cy="0"/>
-        </a:xfrm>
-      </p:grpSpPr>
-      <p:pic>
-        <p:nvPicPr>
-          <p:cNvPr id="2" name="Image 0" descr="/Users/dogan/Documents/Vaults/Courses/wiki/classes/media-studies/decks/_build/img/crops/monet-magpie_a1777.jpg">    </p:cNvPr>
-          <p:cNvPicPr>
-            <a:picLocks noChangeAspect="1"/>
-          </p:cNvPicPr>
-          <p:nvPr/>
-        </p:nvPicPr>
-        <p:blipFill>
-          <a:blip r:embed="rId1"/>
-          <a:stretch>
-            <a:fillRect/>
-          </a:stretch>
-        </p:blipFill>
-        <p:spPr>
-          <a:xfrm>
-            <a:off x="0" y="0"/>
-            <a:ext cx="12188952" cy="6858000"/>
-          </a:xfrm>
-          <a:prstGeom prst="rect">
-            <a:avLst/>
-          </a:prstGeom>
-        </p:spPr>
-      </p:pic>
-      <p:sp>
-        <p:nvSpPr>
-          <p:cNvPr id="3" name="Shape 0"/>
-          <p:cNvSpPr/>
-          <p:nvPr/>
-        </p:nvSpPr>
-        <p:spPr>
-          <a:xfrm>
-            <a:off x="502920" y="502920"/>
-            <a:ext cx="5120640" cy="502920"/>
-          </a:xfrm>
-          <a:prstGeom prst="rect">
-            <a:avLst/>
-          </a:prstGeom>
-          <a:solidFill>
-            <a:srgbClr val="FAF8F1"/>
-          </a:solidFill>
-          <a:ln/>
-        </p:spPr>
-      </p:sp>
-      <p:sp>
-        <p:nvSpPr>
-          <p:cNvPr id="4" name="Text 1"/>
-          <p:cNvSpPr/>
-          <p:nvPr/>
-        </p:nvSpPr>
-        <p:spPr>
-          <a:xfrm>
-            <a:off x="704088" y="521208"/>
-            <a:ext cx="4846320" cy="274320"/>
-          </a:xfrm>
-          <a:prstGeom prst="rect">
-            <a:avLst/>
-          </a:prstGeom>
-          <a:noFill/>
-          <a:ln/>
-        </p:spPr>
-        <p:txBody>
-          <a:bodyPr wrap="square" lIns="0" tIns="0" rIns="0" bIns="0" rtlCol="0" anchor="ctr"/>
-          <a:lstStyle/>
-          <a:p>
-            <a:pPr algn="l" indent="0" marL="0">
-              <a:buNone/>
-            </a:pPr>
-            <a:r>
-              <a:rPr lang="en-US" sz="1100" b="1" spc="250" kern="0" dirty="0">
-                <a:solidFill>
-                  <a:srgbClr val="4A6B5D"/>
-                </a:solidFill>
-                <a:latin typeface="Arial" pitchFamily="34" charset="0"/>
-                <a:ea typeface="Arial" pitchFamily="34" charset="-122"/>
-                <a:cs typeface="Arial" pitchFamily="34" charset="-120"/>
-              </a:rPr>
-              <a:t>THE WORK IS DONE AND SAT</a:t>
-            </a:r>
-            <a:endParaRPr lang="en-US" sz="1100" dirty="0"/>
-          </a:p>
-        </p:txBody>
-      </p:sp>
-      <p:sp>
-        <p:nvSpPr>
-          <p:cNvPr id="5" name="Shape 2"/>
-          <p:cNvSpPr/>
-          <p:nvPr/>
-        </p:nvSpPr>
-        <p:spPr>
-          <a:xfrm>
-            <a:off x="457200" y="5230368"/>
-            <a:ext cx="8778240" cy="1243584"/>
-          </a:xfrm>
-          <a:prstGeom prst="rect">
-            <a:avLst/>
-          </a:prstGeom>
-          <a:solidFill>
-            <a:srgbClr val="FAF8F1"/>
-          </a:solidFill>
-          <a:ln/>
-        </p:spPr>
-      </p:sp>
-      <p:sp>
-        <p:nvSpPr>
-          <p:cNvPr id="6" name="Shape 3"/>
-          <p:cNvSpPr/>
-          <p:nvPr/>
-        </p:nvSpPr>
-        <p:spPr>
-          <a:xfrm>
-            <a:off x="676656" y="5468112"/>
-            <a:ext cx="731520" cy="0"/>
-          </a:xfrm>
-          <a:prstGeom prst="line">
-            <a:avLst/>
-          </a:prstGeom>
-          <a:noFill/>
-          <a:ln w="28575">
-            <a:solidFill>
-              <a:srgbClr val="8C3A38"/>
-            </a:solidFill>
-            <a:prstDash val="solid"/>
-          </a:ln>
-        </p:spPr>
-      </p:sp>
-      <p:sp>
-        <p:nvSpPr>
-          <p:cNvPr id="7" name="Text 4"/>
-          <p:cNvSpPr/>
-          <p:nvPr/>
-        </p:nvSpPr>
-        <p:spPr>
-          <a:xfrm>
-            <a:off x="676656" y="5541264"/>
-            <a:ext cx="8339328" cy="585216"/>
-          </a:xfrm>
-          <a:prstGeom prst="rect">
-            <a:avLst/>
-          </a:prstGeom>
-          <a:noFill/>
-          <a:ln/>
-        </p:spPr>
-        <p:txBody>
-          <a:bodyPr wrap="square" lIns="0" tIns="0" rIns="0" bIns="0" rtlCol="0" anchor="t"/>
-          <a:lstStyle/>
-          <a:p>
-            <a:pPr indent="0" marL="0">
-              <a:lnSpc>
-                <a:spcPts val="2200"/>
-              </a:lnSpc>
-              <a:buNone/>
-            </a:pPr>
-            <a:r>
-              <a:rPr lang="en-US" sz="1800" dirty="0">
-                <a:solidFill>
-                  <a:srgbClr val="24313F"/>
-                </a:solidFill>
-                <a:latin typeface="Georgia" pitchFamily="34" charset="0"/>
-                <a:ea typeface="Georgia" pitchFamily="34" charset="-122"/>
-                <a:cs typeface="Georgia" pitchFamily="34" charset="-120"/>
-              </a:rPr>
-              <a:t>The paper is written. What is left is the reading of what it says about the term.</a:t>
-            </a:r>
-            <a:endParaRPr lang="en-US" sz="1800" dirty="0"/>
-          </a:p>
-        </p:txBody>
-      </p:sp>
-      <p:sp>
-        <p:nvSpPr>
-          <p:cNvPr id="8" name="Text 5"/>
-          <p:cNvSpPr/>
-          <p:nvPr/>
-        </p:nvSpPr>
-        <p:spPr>
-          <a:xfrm>
-            <a:off x="676656" y="6181344"/>
-            <a:ext cx="8339328" cy="256032"/>
-          </a:xfrm>
-          <a:prstGeom prst="rect">
-            <a:avLst/>
-          </a:prstGeom>
-          <a:noFill/>
-          <a:ln/>
-        </p:spPr>
-        <p:txBody>
-          <a:bodyPr wrap="square" lIns="0" tIns="0" rIns="0" bIns="0" rtlCol="0" anchor="ctr"/>
-          <a:lstStyle/>
-          <a:p>
-            <a:pPr indent="0" marL="0">
-              <a:buNone/>
-            </a:pPr>
-            <a:r>
-              <a:rPr lang="en-US" sz="950" spc="50" kern="0" dirty="0">
-                <a:solidFill>
-                  <a:srgbClr val="7A7F72"/>
-                </a:solidFill>
-                <a:latin typeface="Arial" pitchFamily="34" charset="0"/>
-                <a:ea typeface="Arial" pitchFamily="34" charset="-122"/>
-                <a:cs typeface="Arial" pitchFamily="34" charset="-120"/>
-              </a:rPr>
-              <a:t>Claude Monet, The Magpie, 1869</a:t>
-            </a:r>
-            <a:endParaRPr lang="en-US" sz="950" dirty="0"/>
           </a:p>
         </p:txBody>
       </p:sp>
@@ -3777,7 +4425,7 @@
                 <a:ea typeface="Arial" pitchFamily="34" charset="-122"/>
                 <a:cs typeface="Arial" pitchFamily="34" charset="-120"/>
               </a:rPr>
-              <a:t>THE TARGET SHEET</a:t>
+              <a:t>WHAT THE EXAMINERS SAW</a:t>
             </a:r>
             <a:endParaRPr lang="en-US" sz="1100" dirty="0"/>
           </a:p>
@@ -3816,7 +4464,7 @@
                 <a:ea typeface="Arial" pitchFamily="34" charset="-122"/>
                 <a:cs typeface="Arial" pitchFamily="34" charset="-120"/>
               </a:rPr>
-              <a:t>ONE PAGE, BUILT TO BE READ IN FEBRUARY</a:t>
+              <a:t>RETURN DAY ONLY · AFTER EVERY SCRIPT IS IN</a:t>
             </a:r>
             <a:endParaRPr lang="en-US" sz="1100" dirty="0"/>
           </a:p>
@@ -3847,159 +4495,21 @@
       </p:sp>
       <p:sp>
         <p:nvSpPr>
-          <p:cNvPr id="5" name="Text 3"/>
-          <p:cNvSpPr/>
-          <p:nvPr/>
-        </p:nvSpPr>
-        <p:spPr>
-          <a:xfrm>
-            <a:off x="822960" y="932688"/>
-            <a:ext cx="10543032" cy="640080"/>
-          </a:xfrm>
-          <a:prstGeom prst="rect">
-            <a:avLst/>
-          </a:prstGeom>
-          <a:noFill/>
-          <a:ln/>
-        </p:spPr>
-        <p:txBody>
-          <a:bodyPr wrap="square" lIns="0" tIns="0" rIns="0" bIns="0" rtlCol="0" anchor="ctr"/>
-          <a:lstStyle/>
-          <a:p>
-            <a:pPr indent="0" marL="0">
-              <a:buNone/>
-            </a:pPr>
-            <a:r>
-              <a:rPr lang="en-US" sz="3200" dirty="0">
-                <a:solidFill>
-                  <a:srgbClr val="24313F"/>
-                </a:solidFill>
-                <a:latin typeface="Georgia" pitchFamily="34" charset="0"/>
-                <a:ea typeface="Georgia" pitchFamily="34" charset="-122"/>
-                <a:cs typeface="Georgia" pitchFamily="34" charset="-120"/>
-              </a:rPr>
-              <a:t>Four rows, per student</a:t>
-            </a:r>
-            <a:endParaRPr lang="en-US" sz="3200" dirty="0"/>
-          </a:p>
-        </p:txBody>
-      </p:sp>
-      <p:sp>
-        <p:nvSpPr>
-          <p:cNvPr id="6" name="Shape 4"/>
-          <p:cNvSpPr/>
-          <p:nvPr/>
-        </p:nvSpPr>
-        <p:spPr>
-          <a:xfrm>
-            <a:off x="822960" y="1783080"/>
-            <a:ext cx="10543032" cy="0"/>
-          </a:xfrm>
-          <a:prstGeom prst="line">
-            <a:avLst/>
-          </a:prstGeom>
-          <a:noFill/>
-          <a:ln w="12700">
-            <a:solidFill>
-              <a:srgbClr val="24313F"/>
-            </a:solidFill>
-            <a:prstDash val="solid"/>
-          </a:ln>
-        </p:spPr>
-      </p:sp>
-      <p:sp>
-        <p:nvSpPr>
-          <p:cNvPr id="7" name="Text 5"/>
-          <p:cNvSpPr/>
-          <p:nvPr/>
-        </p:nvSpPr>
-        <p:spPr>
-          <a:xfrm>
-            <a:off x="822960" y="1783080"/>
-            <a:ext cx="2743200" cy="749808"/>
-          </a:xfrm>
-          <a:prstGeom prst="rect">
-            <a:avLst/>
-          </a:prstGeom>
-          <a:noFill/>
-          <a:ln/>
-        </p:spPr>
-        <p:txBody>
-          <a:bodyPr wrap="square" lIns="0" tIns="0" rIns="0" bIns="0" rtlCol="0" anchor="ctr"/>
-          <a:lstStyle/>
-          <a:p>
-            <a:pPr indent="0" marL="0">
-              <a:buNone/>
-            </a:pPr>
-            <a:r>
-              <a:rPr lang="en-US" sz="2000" dirty="0">
-                <a:solidFill>
-                  <a:srgbClr val="4A6B5D"/>
-                </a:solidFill>
-                <a:latin typeface="Georgia" pitchFamily="34" charset="0"/>
-                <a:ea typeface="Georgia" pitchFamily="34" charset="-122"/>
-                <a:cs typeface="Georgia" pitchFamily="34" charset="-120"/>
-              </a:rPr>
-              <a:t>Gap</a:t>
-            </a:r>
-            <a:endParaRPr lang="en-US" sz="2000" dirty="0"/>
-          </a:p>
-        </p:txBody>
-      </p:sp>
-      <p:sp>
-        <p:nvSpPr>
-          <p:cNvPr id="8" name="Text 6"/>
-          <p:cNvSpPr/>
-          <p:nvPr/>
-        </p:nvSpPr>
-        <p:spPr>
-          <a:xfrm>
-            <a:off x="3657600" y="1783080"/>
-            <a:ext cx="7680960" cy="749808"/>
-          </a:xfrm>
-          <a:prstGeom prst="rect">
-            <a:avLst/>
-          </a:prstGeom>
-          <a:noFill/>
-          <a:ln/>
-        </p:spPr>
-        <p:txBody>
-          <a:bodyPr wrap="square" lIns="0" tIns="0" rIns="0" bIns="0" rtlCol="0" anchor="ctr"/>
-          <a:lstStyle/>
-          <a:p>
-            <a:pPr indent="0" marL="0">
-              <a:buNone/>
-            </a:pPr>
-            <a:r>
-              <a:rPr lang="en-US" sz="1650" dirty="0">
-                <a:solidFill>
-                  <a:srgbClr val="24313F"/>
-                </a:solidFill>
-                <a:latin typeface="Georgia" pitchFamily="34" charset="0"/>
-                <a:ea typeface="Georgia" pitchFamily="34" charset="-122"/>
-                <a:cs typeface="Georgia" pitchFamily="34" charset="-120"/>
-              </a:rPr>
-              <a:t>in AO language: which objective is the shortfall</a:t>
-            </a:r>
-            <a:endParaRPr lang="en-US" sz="1650" dirty="0"/>
-          </a:p>
-        </p:txBody>
-      </p:sp>
-      <p:sp>
-        <p:nvSpPr>
-          <p:cNvPr id="9" name="Shape 7"/>
-          <p:cNvSpPr/>
-          <p:nvPr/>
-        </p:nvSpPr>
-        <p:spPr>
-          <a:xfrm>
-            <a:off x="822960" y="2532888"/>
-            <a:ext cx="10543032" cy="0"/>
-          </a:xfrm>
-          <a:prstGeom prst="line">
-            <a:avLst/>
-          </a:prstGeom>
-          <a:noFill/>
+          <p:cNvPr id="5" name="Shape 3"/>
+          <p:cNvSpPr/>
+          <p:nvPr/>
+        </p:nvSpPr>
+        <p:spPr>
+          <a:xfrm>
+            <a:off x="822960" y="1143000"/>
+            <a:ext cx="6035040" cy="3931920"/>
+          </a:xfrm>
+          <a:prstGeom prst="rect">
+            <a:avLst/>
+          </a:prstGeom>
+          <a:solidFill>
+            <a:srgbClr val="FAF8F1"/>
+          </a:solidFill>
           <a:ln w="9525">
             <a:solidFill>
               <a:srgbClr val="D9D4C4"/>
@@ -4008,16 +4518,40 @@
           </a:ln>
         </p:spPr>
       </p:sp>
-      <p:sp>
-        <p:nvSpPr>
-          <p:cNvPr id="10" name="Text 8"/>
-          <p:cNvSpPr/>
-          <p:nvPr/>
-        </p:nvSpPr>
-        <p:spPr>
-          <a:xfrm>
-            <a:off x="822960" y="2532888"/>
-            <a:ext cx="2743200" cy="749808"/>
+      <p:pic>
+        <p:nvPicPr>
+          <p:cNvPr id="6" name="Image 0" descr="/Users/dogan/Documents/Vaults/Courses/wiki/classes/media-studies/decks/_build/img/servant-still.jpg">    </p:cNvPr>
+          <p:cNvPicPr>
+            <a:picLocks noChangeAspect="1"/>
+          </p:cNvPicPr>
+          <p:nvPr/>
+        </p:nvPicPr>
+        <p:blipFill>
+          <a:blip r:embed="rId1"/>
+          <a:stretch>
+            <a:fillRect/>
+          </a:stretch>
+        </p:blipFill>
+        <p:spPr>
+          <a:xfrm>
+            <a:off x="950976" y="1483614"/>
+            <a:ext cx="5779008" cy="3250692"/>
+          </a:xfrm>
+          <a:prstGeom prst="rect">
+            <a:avLst/>
+          </a:prstGeom>
+        </p:spPr>
+      </p:pic>
+      <p:sp>
+        <p:nvSpPr>
+          <p:cNvPr id="7" name="Text 4"/>
+          <p:cNvSpPr/>
+          <p:nvPr/>
+        </p:nvSpPr>
+        <p:spPr>
+          <a:xfrm>
+            <a:off x="822960" y="5120640"/>
+            <a:ext cx="6035040" cy="274320"/>
           </a:xfrm>
           <a:prstGeom prst="rect">
             <a:avLst/>
@@ -4029,78 +4563,41 @@
           <a:bodyPr wrap="square" lIns="0" tIns="0" rIns="0" bIns="0" rtlCol="0" anchor="ctr"/>
           <a:lstStyle/>
           <a:p>
-            <a:pPr indent="0" marL="0">
-              <a:buNone/>
-            </a:pPr>
-            <a:r>
-              <a:rPr lang="en-US" sz="2000" dirty="0">
-                <a:solidFill>
-                  <a:srgbClr val="4A6B5D"/>
-                </a:solidFill>
-                <a:latin typeface="Georgia" pitchFamily="34" charset="0"/>
-                <a:ea typeface="Georgia" pitchFamily="34" charset="-122"/>
-                <a:cs typeface="Georgia" pitchFamily="34" charset="-120"/>
-              </a:rPr>
-              <a:t>Evidence</a:t>
-            </a:r>
-            <a:endParaRPr lang="en-US" sz="2000" dirty="0"/>
-          </a:p>
-        </p:txBody>
-      </p:sp>
-      <p:sp>
-        <p:nvSpPr>
-          <p:cNvPr id="11" name="Text 9"/>
-          <p:cNvSpPr/>
-          <p:nvPr/>
-        </p:nvSpPr>
-        <p:spPr>
-          <a:xfrm>
-            <a:off x="3657600" y="2532888"/>
-            <a:ext cx="7680960" cy="749808"/>
-          </a:xfrm>
-          <a:prstGeom prst="rect">
-            <a:avLst/>
-          </a:prstGeom>
-          <a:noFill/>
-          <a:ln/>
-        </p:spPr>
-        <p:txBody>
-          <a:bodyPr wrap="square" lIns="0" tIns="0" rIns="0" bIns="0" rtlCol="0" anchor="ctr"/>
-          <a:lstStyle/>
-          <a:p>
-            <a:pPr indent="0" marL="0">
-              <a:buNone/>
-            </a:pPr>
-            <a:r>
-              <a:rPr lang="en-US" sz="1650" dirty="0">
-                <a:solidFill>
-                  <a:srgbClr val="24313F"/>
-                </a:solidFill>
-                <a:latin typeface="Georgia" pitchFamily="34" charset="0"/>
-                <a:ea typeface="Georgia" pitchFamily="34" charset="-122"/>
-                <a:cs typeface="Georgia" pitchFamily="34" charset="-120"/>
-              </a:rPr>
-              <a:t>script plus the semester data: A1, A3, A4, EoT</a:t>
-            </a:r>
-            <a:endParaRPr lang="en-US" sz="1650" dirty="0"/>
-          </a:p>
-        </p:txBody>
-      </p:sp>
-      <p:sp>
-        <p:nvSpPr>
-          <p:cNvPr id="12" name="Shape 10"/>
-          <p:cNvSpPr/>
-          <p:nvPr/>
-        </p:nvSpPr>
-        <p:spPr>
-          <a:xfrm>
-            <a:off x="822960" y="3282696"/>
-            <a:ext cx="10543032" cy="0"/>
-          </a:xfrm>
-          <a:prstGeom prst="line">
-            <a:avLst/>
-          </a:prstGeom>
-          <a:noFill/>
+            <a:pPr algn="ctr" indent="0" marL="0">
+              <a:buNone/>
+            </a:pPr>
+            <a:r>
+              <a:rPr lang="en-US" sz="1000" dirty="0">
+                <a:solidFill>
+                  <a:srgbClr val="7A7F72"/>
+                </a:solidFill>
+                <a:latin typeface="Arial" pitchFamily="34" charset="0"/>
+                <a:ea typeface="Arial" pitchFamily="34" charset="-122"/>
+                <a:cs typeface="Arial" pitchFamily="34" charset="-120"/>
+              </a:rPr>
+              <a:t>Apple TV+, Servant, S1 E1 'Reborn' (2019), dir. M. Night Shyamalan</a:t>
+            </a:r>
+            <a:endParaRPr lang="en-US" sz="1000" dirty="0"/>
+          </a:p>
+        </p:txBody>
+      </p:sp>
+      <p:sp>
+        <p:nvSpPr>
+          <p:cNvPr id="8" name="Shape 5"/>
+          <p:cNvSpPr/>
+          <p:nvPr/>
+        </p:nvSpPr>
+        <p:spPr>
+          <a:xfrm>
+            <a:off x="7223760" y="1097280"/>
+            <a:ext cx="4114800" cy="4389120"/>
+          </a:xfrm>
+          <a:prstGeom prst="rect">
+            <a:avLst/>
+          </a:prstGeom>
+          <a:solidFill>
+            <a:srgbClr val="FAF8F1"/>
+          </a:solidFill>
           <a:ln w="9525">
             <a:solidFill>
               <a:srgbClr val="D9D4C4"/>
@@ -4109,16 +4606,40 @@
           </a:ln>
         </p:spPr>
       </p:sp>
-      <p:sp>
-        <p:nvSpPr>
-          <p:cNvPr id="13" name="Text 11"/>
-          <p:cNvSpPr/>
-          <p:nvPr/>
-        </p:nvSpPr>
-        <p:spPr>
-          <a:xfrm>
-            <a:off x="822960" y="3282696"/>
-            <a:ext cx="2743200" cy="749808"/>
+      <p:pic>
+        <p:nvPicPr>
+          <p:cNvPr id="9" name="Image 1" descr="/Users/dogan/Documents/Vaults/Courses/wiki/classes/media-studies/decks/_build/img/ms23-p9-meaning.jpg">    </p:cNvPr>
+          <p:cNvPicPr>
+            <a:picLocks noChangeAspect="1"/>
+          </p:cNvPicPr>
+          <p:nvPr/>
+        </p:nvPicPr>
+        <p:blipFill>
+          <a:blip r:embed="rId2"/>
+          <a:stretch>
+            <a:fillRect/>
+          </a:stretch>
+        </p:blipFill>
+        <p:spPr>
+          <a:xfrm>
+            <a:off x="7351776" y="1927496"/>
+            <a:ext cx="3858768" cy="2728688"/>
+          </a:xfrm>
+          <a:prstGeom prst="rect">
+            <a:avLst/>
+          </a:prstGeom>
+        </p:spPr>
+      </p:pic>
+      <p:sp>
+        <p:nvSpPr>
+          <p:cNvPr id="10" name="Text 6"/>
+          <p:cNvSpPr/>
+          <p:nvPr/>
+        </p:nvSpPr>
+        <p:spPr>
+          <a:xfrm>
+            <a:off x="7223760" y="5532120"/>
+            <a:ext cx="4114800" cy="320040"/>
           </a:xfrm>
           <a:prstGeom prst="rect">
             <a:avLst/>
@@ -4130,11 +4651,73 @@
           <a:bodyPr wrap="square" lIns="0" tIns="0" rIns="0" bIns="0" rtlCol="0" anchor="ctr"/>
           <a:lstStyle/>
           <a:p>
+            <a:pPr algn="ctr" indent="0" marL="0">
+              <a:buNone/>
+            </a:pPr>
+            <a:r>
+              <a:rPr lang="en-US" sz="1000" dirty="0">
+                <a:solidFill>
+                  <a:srgbClr val="7A7F72"/>
+                </a:solidFill>
+                <a:latin typeface="Arial" pitchFamily="34" charset="0"/>
+                <a:ea typeface="Arial" pitchFamily="34" charset="-122"/>
+                <a:cs typeface="Arial" pitchFamily="34" charset="-120"/>
+              </a:rPr>
+              <a:t>The mark scheme's own Meaning paragraph for the extract you sat</a:t>
+            </a:r>
+            <a:endParaRPr lang="en-US" sz="1000" dirty="0"/>
+          </a:p>
+        </p:txBody>
+      </p:sp>
+      <p:sp>
+        <p:nvSpPr>
+          <p:cNvPr id="11" name="Shape 7"/>
+          <p:cNvSpPr/>
+          <p:nvPr/>
+        </p:nvSpPr>
+        <p:spPr>
+          <a:xfrm>
+            <a:off x="822960" y="5806440"/>
+            <a:ext cx="914400" cy="0"/>
+          </a:xfrm>
+          <a:prstGeom prst="line">
+            <a:avLst/>
+          </a:prstGeom>
+          <a:noFill/>
+          <a:ln w="31750">
+            <a:solidFill>
+              <a:srgbClr val="8C3A38"/>
+            </a:solidFill>
+            <a:prstDash val="solid"/>
+          </a:ln>
+        </p:spPr>
+      </p:sp>
+      <p:sp>
+        <p:nvSpPr>
+          <p:cNvPr id="12" name="Text 8"/>
+          <p:cNvSpPr/>
+          <p:nvPr/>
+        </p:nvSpPr>
+        <p:spPr>
+          <a:xfrm>
+            <a:off x="822960" y="5943600"/>
+            <a:ext cx="10543032" cy="411480"/>
+          </a:xfrm>
+          <a:prstGeom prst="rect">
+            <a:avLst/>
+          </a:prstGeom>
+          <a:noFill/>
+          <a:ln/>
+        </p:spPr>
+        <p:txBody>
+          <a:bodyPr wrap="square" lIns="0" tIns="0" rIns="0" bIns="0" rtlCol="0" anchor="ctr"/>
+          <a:lstStyle/>
+          <a:p>
             <a:pPr indent="0" marL="0">
               <a:buNone/>
             </a:pPr>
             <a:r>
-              <a:rPr lang="en-US" sz="2000" dirty="0">
+              <a:rPr lang="en-US" sz="1300" i="1" dirty="0">
                 <a:solidFill>
                   <a:srgbClr val="4A6B5D"/>
                 </a:solidFill>
@@ -4142,60 +4725,21 @@
                 <a:ea typeface="Georgia" pitchFamily="34" charset="-122"/>
                 <a:cs typeface="Georgia" pitchFamily="34" charset="-120"/>
               </a:rPr>
-              <a:t>Action</a:t>
-            </a:r>
-            <a:endParaRPr lang="en-US" sz="2000" dirty="0"/>
-          </a:p>
-        </p:txBody>
-      </p:sp>
-      <p:sp>
-        <p:nvSpPr>
-          <p:cNvPr id="14" name="Text 12"/>
-          <p:cNvSpPr/>
-          <p:nvPr/>
-        </p:nvSpPr>
-        <p:spPr>
-          <a:xfrm>
-            <a:off x="3657600" y="3282696"/>
-            <a:ext cx="7680960" cy="749808"/>
-          </a:xfrm>
-          <a:prstGeom prst="rect">
-            <a:avLst/>
-          </a:prstGeom>
-          <a:noFill/>
-          <a:ln/>
-        </p:spPr>
-        <p:txBody>
-          <a:bodyPr wrap="square" lIns="0" tIns="0" rIns="0" bIns="0" rtlCol="0" anchor="ctr"/>
-          <a:lstStyle/>
-          <a:p>
-            <a:pPr indent="0" marL="0">
-              <a:buNone/>
-            </a:pPr>
-            <a:r>
-              <a:rPr lang="en-US" sz="1650" dirty="0">
-                <a:solidFill>
-                  <a:srgbClr val="24313F"/>
-                </a:solidFill>
-                <a:latin typeface="Georgia" pitchFamily="34" charset="0"/>
-                <a:ea typeface="Georgia" pitchFamily="34" charset="-122"/>
-                <a:cs typeface="Georgia" pitchFamily="34" charset="-120"/>
-              </a:rPr>
-              <a:t>specific and Semester 2 shaped, not a resolution</a:t>
-            </a:r>
-            <a:endParaRPr lang="en-US" sz="1650" dirty="0"/>
-          </a:p>
-        </p:txBody>
-      </p:sp>
-      <p:sp>
-        <p:nvSpPr>
-          <p:cNvPr id="15" name="Shape 13"/>
-          <p:cNvSpPr/>
-          <p:nvPr/>
-        </p:nvSpPr>
-        <p:spPr>
-          <a:xfrm>
-            <a:off x="822960" y="4032504"/>
+              <a:t>The extract was Servant's opening five minutes. Read the examiners' reading beside your own memory of what you wrote: the gap between the two is Semester 2's syllabus in miniature.</a:t>
+            </a:r>
+            <a:endParaRPr lang="en-US" sz="1300" dirty="0"/>
+          </a:p>
+        </p:txBody>
+      </p:sp>
+      <p:sp>
+        <p:nvSpPr>
+          <p:cNvPr id="13" name="Shape 9"/>
+          <p:cNvSpPr/>
+          <p:nvPr/>
+        </p:nvSpPr>
+        <p:spPr>
+          <a:xfrm>
+            <a:off x="822960" y="6382512"/>
             <a:ext cx="10543032" cy="0"/>
           </a:xfrm>
           <a:prstGeom prst="line">
@@ -4212,14 +4756,14 @@
       </p:sp>
       <p:sp>
         <p:nvSpPr>
-          <p:cNvPr id="16" name="Text 14"/>
-          <p:cNvSpPr/>
-          <p:nvPr/>
-        </p:nvSpPr>
-        <p:spPr>
-          <a:xfrm>
-            <a:off x="822960" y="4032504"/>
-            <a:ext cx="2743200" cy="749808"/>
+          <p:cNvPr id="14" name="Text 10"/>
+          <p:cNvSpPr/>
+          <p:nvPr/>
+        </p:nvSpPr>
+        <p:spPr>
+          <a:xfrm>
+            <a:off x="822960" y="6419088"/>
+            <a:ext cx="7315200" cy="274320"/>
           </a:xfrm>
           <a:prstGeom prst="rect">
             <a:avLst/>
@@ -4235,108 +4779,7 @@
               <a:buNone/>
             </a:pPr>
             <a:r>
-              <a:rPr lang="en-US" sz="2000" dirty="0">
-                <a:solidFill>
-                  <a:srgbClr val="4A6B5D"/>
-                </a:solidFill>
-                <a:latin typeface="Georgia" pitchFamily="34" charset="0"/>
-                <a:ea typeface="Georgia" pitchFamily="34" charset="-122"/>
-                <a:cs typeface="Georgia" pitchFamily="34" charset="-120"/>
-              </a:rPr>
-              <a:t>Review date</a:t>
-            </a:r>
-            <a:endParaRPr lang="en-US" sz="2000" dirty="0"/>
-          </a:p>
-        </p:txBody>
-      </p:sp>
-      <p:sp>
-        <p:nvSpPr>
-          <p:cNvPr id="17" name="Text 15"/>
-          <p:cNvSpPr/>
-          <p:nvPr/>
-        </p:nvSpPr>
-        <p:spPr>
-          <a:xfrm>
-            <a:off x="3657600" y="4032504"/>
-            <a:ext cx="7680960" cy="749808"/>
-          </a:xfrm>
-          <a:prstGeom prst="rect">
-            <a:avLst/>
-          </a:prstGeom>
-          <a:noFill/>
-          <a:ln/>
-        </p:spPr>
-        <p:txBody>
-          <a:bodyPr wrap="square" lIns="0" tIns="0" rIns="0" bIns="0" rtlCol="0" anchor="ctr"/>
-          <a:lstStyle/>
-          <a:p>
-            <a:pPr indent="0" marL="0">
-              <a:buNone/>
-            </a:pPr>
-            <a:r>
-              <a:rPr lang="en-US" sz="1650" dirty="0">
-                <a:solidFill>
-                  <a:srgbClr val="24313F"/>
-                </a:solidFill>
-                <a:latin typeface="Georgia" pitchFamily="34" charset="0"/>
-                <a:ea typeface="Georgia" pitchFamily="34" charset="-122"/>
-                <a:cs typeface="Georgia" pitchFamily="34" charset="-120"/>
-              </a:rPr>
-              <a:t>a named S2 week, before the first S2 attainment</a:t>
-            </a:r>
-            <a:endParaRPr lang="en-US" sz="1650" dirty="0"/>
-          </a:p>
-        </p:txBody>
-      </p:sp>
-      <p:sp>
-        <p:nvSpPr>
-          <p:cNvPr id="18" name="Shape 16"/>
-          <p:cNvSpPr/>
-          <p:nvPr/>
-        </p:nvSpPr>
-        <p:spPr>
-          <a:xfrm>
-            <a:off x="822960" y="4782312"/>
-            <a:ext cx="10543032" cy="0"/>
-          </a:xfrm>
-          <a:prstGeom prst="line">
-            <a:avLst/>
-          </a:prstGeom>
-          <a:noFill/>
-          <a:ln w="9525">
-            <a:solidFill>
-              <a:srgbClr val="D9D4C4"/>
-            </a:solidFill>
-            <a:prstDash val="solid"/>
-          </a:ln>
-        </p:spPr>
-      </p:sp>
-      <p:sp>
-        <p:nvSpPr>
-          <p:cNvPr id="19" name="Text 17"/>
-          <p:cNvSpPr/>
-          <p:nvPr/>
-        </p:nvSpPr>
-        <p:spPr>
-          <a:xfrm>
-            <a:off x="822960" y="4919472"/>
-            <a:ext cx="10543032" cy="365760"/>
-          </a:xfrm>
-          <a:prstGeom prst="rect">
-            <a:avLst/>
-          </a:prstGeom>
-          <a:noFill/>
-          <a:ln/>
-        </p:spPr>
-        <p:txBody>
-          <a:bodyPr wrap="square" lIns="0" tIns="0" rIns="0" bIns="0" rtlCol="0" anchor="ctr"/>
-          <a:lstStyle/>
-          <a:p>
-            <a:pPr indent="0" marL="0">
-              <a:buNone/>
-            </a:pPr>
-            <a:r>
-              <a:rPr lang="en-US" sz="1200" i="1" dirty="0">
+              <a:rPr lang="en-US" sz="900" spc="150" kern="0" dirty="0">
                 <a:solidFill>
                   <a:srgbClr val="7A7F72"/>
                 </a:solidFill>
@@ -4344,68 +4787,6 @@
                 <a:ea typeface="Arial" pitchFamily="34" charset="-122"/>
                 <a:cs typeface="Arial" pitchFamily="34" charset="-120"/>
               </a:rPr>
-              <a:t>Built to survive being read in February by the person who wrote it in January. Posted as LB7.</a:t>
-            </a:r>
-            <a:endParaRPr lang="en-US" sz="1200" dirty="0"/>
-          </a:p>
-        </p:txBody>
-      </p:sp>
-      <p:sp>
-        <p:nvSpPr>
-          <p:cNvPr id="20" name="Shape 18"/>
-          <p:cNvSpPr/>
-          <p:nvPr/>
-        </p:nvSpPr>
-        <p:spPr>
-          <a:xfrm>
-            <a:off x="822960" y="6382512"/>
-            <a:ext cx="10543032" cy="0"/>
-          </a:xfrm>
-          <a:prstGeom prst="line">
-            <a:avLst/>
-          </a:prstGeom>
-          <a:noFill/>
-          <a:ln w="9525">
-            <a:solidFill>
-              <a:srgbClr val="D9D4C4"/>
-            </a:solidFill>
-            <a:prstDash val="solid"/>
-          </a:ln>
-        </p:spPr>
-      </p:sp>
-      <p:sp>
-        <p:nvSpPr>
-          <p:cNvPr id="21" name="Text 19"/>
-          <p:cNvSpPr/>
-          <p:nvPr/>
-        </p:nvSpPr>
-        <p:spPr>
-          <a:xfrm>
-            <a:off x="822960" y="6419088"/>
-            <a:ext cx="7315200" cy="274320"/>
-          </a:xfrm>
-          <a:prstGeom prst="rect">
-            <a:avLst/>
-          </a:prstGeom>
-          <a:noFill/>
-          <a:ln/>
-        </p:spPr>
-        <p:txBody>
-          <a:bodyPr wrap="square" lIns="0" tIns="0" rIns="0" bIns="0" rtlCol="0" anchor="ctr"/>
-          <a:lstStyle/>
-          <a:p>
-            <a:pPr indent="0" marL="0">
-              <a:buNone/>
-            </a:pPr>
-            <a:r>
-              <a:rPr lang="en-US" sz="900" spc="150" kern="0" dirty="0">
-                <a:solidFill>
-                  <a:srgbClr val="7A7F72"/>
-                </a:solidFill>
-                <a:latin typeface="Arial" pitchFamily="34" charset="0"/>
-                <a:ea typeface="Arial" pitchFamily="34" charset="-122"/>
-                <a:cs typeface="Arial" pitchFamily="34" charset="-120"/>
-              </a:rPr>
               <a:t>MEDIA STUDIES 9607 · SEMESTER I</a:t>
             </a:r>
             <a:endParaRPr lang="en-US" sz="900" dirty="0"/>
@@ -4414,7 +4795,7 @@
       </p:sp>
       <p:sp>
         <p:nvSpPr>
-          <p:cNvPr id="22" name="Text 20"/>
+          <p:cNvPr id="15" name="Text 11"/>
           <p:cNvSpPr/>
           <p:nvPr/>
         </p:nvSpPr>
@@ -4462,6 +4843,1148 @@
 <file path=ppt/slides/slide8.xml><?xml version="1.0" encoding="utf-8"?>
 <p:sld xmlns:a="http://schemas.openxmlformats.org/drawingml/2006/main" xmlns:r="http://schemas.openxmlformats.org/officeDocument/2006/relationships" xmlns:p="http://schemas.openxmlformats.org/presentationml/2006/main">
   <p:cSld name="Slide 8">
+    <p:bg>
+      <p:bgPr>
+        <a:solidFill>
+          <a:srgbClr val="FAF8F1"/>
+        </a:solidFill>
+      </p:bgPr>
+    </p:bg>
+    <p:spTree>
+      <p:nvGrpSpPr>
+        <p:cNvPr id="1" name=""/>
+        <p:cNvGrpSpPr/>
+        <p:nvPr/>
+      </p:nvGrpSpPr>
+      <p:grpSpPr>
+        <a:xfrm>
+          <a:off x="0" y="0"/>
+          <a:ext cx="0" cy="0"/>
+          <a:chOff x="0" y="0"/>
+          <a:chExt cx="0" cy="0"/>
+        </a:xfrm>
+      </p:grpSpPr>
+      <p:sp>
+        <p:nvSpPr>
+          <p:cNvPr id="2" name="Text 0"/>
+          <p:cNvSpPr/>
+          <p:nvPr/>
+        </p:nvSpPr>
+        <p:spPr>
+          <a:xfrm>
+            <a:off x="822960" y="457200"/>
+            <a:ext cx="6400800" cy="274320"/>
+          </a:xfrm>
+          <a:prstGeom prst="rect">
+            <a:avLst/>
+          </a:prstGeom>
+          <a:noFill/>
+          <a:ln/>
+        </p:spPr>
+        <p:txBody>
+          <a:bodyPr wrap="square" lIns="0" tIns="0" rIns="0" bIns="0" rtlCol="0" anchor="ctr"/>
+          <a:lstStyle/>
+          <a:p>
+            <a:pPr algn="l" indent="0" marL="0">
+              <a:buNone/>
+            </a:pPr>
+            <a:r>
+              <a:rPr lang="en-US" sz="1100" b="1" spc="250" kern="0" dirty="0">
+                <a:solidFill>
+                  <a:srgbClr val="4A6B5D"/>
+                </a:solidFill>
+                <a:latin typeface="Arial" pitchFamily="34" charset="0"/>
+                <a:ea typeface="Arial" pitchFamily="34" charset="-122"/>
+                <a:cs typeface="Arial" pitchFamily="34" charset="-120"/>
+              </a:rPr>
+              <a:t>THE TARGET SHEET</a:t>
+            </a:r>
+            <a:endParaRPr lang="en-US" sz="1100" dirty="0"/>
+          </a:p>
+        </p:txBody>
+      </p:sp>
+      <p:sp>
+        <p:nvSpPr>
+          <p:cNvPr id="3" name="Text 1"/>
+          <p:cNvSpPr/>
+          <p:nvPr/>
+        </p:nvSpPr>
+        <p:spPr>
+          <a:xfrm>
+            <a:off x="6793992" y="457200"/>
+            <a:ext cx="4572000" cy="274320"/>
+          </a:xfrm>
+          <a:prstGeom prst="rect">
+            <a:avLst/>
+          </a:prstGeom>
+          <a:noFill/>
+          <a:ln/>
+        </p:spPr>
+        <p:txBody>
+          <a:bodyPr wrap="square" lIns="0" tIns="0" rIns="0" bIns="0" rtlCol="0" anchor="ctr"/>
+          <a:lstStyle/>
+          <a:p>
+            <a:pPr algn="r" indent="0" marL="0">
+              <a:buNone/>
+            </a:pPr>
+            <a:r>
+              <a:rPr lang="en-US" sz="1100" b="1" spc="250" kern="0" dirty="0">
+                <a:solidFill>
+                  <a:srgbClr val="7A7F72"/>
+                </a:solidFill>
+                <a:latin typeface="Arial" pitchFamily="34" charset="0"/>
+                <a:ea typeface="Arial" pitchFamily="34" charset="-122"/>
+                <a:cs typeface="Arial" pitchFamily="34" charset="-120"/>
+              </a:rPr>
+              <a:t>ONE PAGE, BUILT TO BE READ IN FEBRUARY</a:t>
+            </a:r>
+            <a:endParaRPr lang="en-US" sz="1100" dirty="0"/>
+          </a:p>
+        </p:txBody>
+      </p:sp>
+      <p:sp>
+        <p:nvSpPr>
+          <p:cNvPr id="4" name="Shape 2"/>
+          <p:cNvSpPr/>
+          <p:nvPr/>
+        </p:nvSpPr>
+        <p:spPr>
+          <a:xfrm>
+            <a:off x="822960" y="786384"/>
+            <a:ext cx="10543032" cy="0"/>
+          </a:xfrm>
+          <a:prstGeom prst="line">
+            <a:avLst/>
+          </a:prstGeom>
+          <a:noFill/>
+          <a:ln w="9525">
+            <a:solidFill>
+              <a:srgbClr val="D9D4C4"/>
+            </a:solidFill>
+            <a:prstDash val="solid"/>
+          </a:ln>
+        </p:spPr>
+      </p:sp>
+      <p:sp>
+        <p:nvSpPr>
+          <p:cNvPr id="5" name="Text 3"/>
+          <p:cNvSpPr/>
+          <p:nvPr/>
+        </p:nvSpPr>
+        <p:spPr>
+          <a:xfrm>
+            <a:off x="822960" y="932688"/>
+            <a:ext cx="6309360" cy="548640"/>
+          </a:xfrm>
+          <a:prstGeom prst="rect">
+            <a:avLst/>
+          </a:prstGeom>
+          <a:noFill/>
+          <a:ln/>
+        </p:spPr>
+        <p:txBody>
+          <a:bodyPr wrap="square" lIns="0" tIns="0" rIns="0" bIns="0" rtlCol="0" anchor="ctr"/>
+          <a:lstStyle/>
+          <a:p>
+            <a:pPr indent="0" marL="0">
+              <a:buNone/>
+            </a:pPr>
+            <a:r>
+              <a:rPr lang="en-US" sz="3000" dirty="0">
+                <a:solidFill>
+                  <a:srgbClr val="24313F"/>
+                </a:solidFill>
+                <a:latin typeface="Georgia" pitchFamily="34" charset="0"/>
+                <a:ea typeface="Georgia" pitchFamily="34" charset="-122"/>
+                <a:cs typeface="Georgia" pitchFamily="34" charset="-120"/>
+              </a:rPr>
+              <a:t>Four rows, per student</a:t>
+            </a:r>
+            <a:endParaRPr lang="en-US" sz="3000" dirty="0"/>
+          </a:p>
+        </p:txBody>
+      </p:sp>
+      <p:sp>
+        <p:nvSpPr>
+          <p:cNvPr id="6" name="Shape 4"/>
+          <p:cNvSpPr/>
+          <p:nvPr/>
+        </p:nvSpPr>
+        <p:spPr>
+          <a:xfrm>
+            <a:off x="822960" y="1645920"/>
+            <a:ext cx="6309360" cy="0"/>
+          </a:xfrm>
+          <a:prstGeom prst="line">
+            <a:avLst/>
+          </a:prstGeom>
+          <a:noFill/>
+          <a:ln w="12700">
+            <a:solidFill>
+              <a:srgbClr val="24313F"/>
+            </a:solidFill>
+            <a:prstDash val="solid"/>
+          </a:ln>
+        </p:spPr>
+      </p:sp>
+      <p:sp>
+        <p:nvSpPr>
+          <p:cNvPr id="7" name="Text 5"/>
+          <p:cNvSpPr/>
+          <p:nvPr/>
+        </p:nvSpPr>
+        <p:spPr>
+          <a:xfrm>
+            <a:off x="822960" y="1645920"/>
+            <a:ext cx="2194560" cy="713232"/>
+          </a:xfrm>
+          <a:prstGeom prst="rect">
+            <a:avLst/>
+          </a:prstGeom>
+          <a:noFill/>
+          <a:ln/>
+        </p:spPr>
+        <p:txBody>
+          <a:bodyPr wrap="square" lIns="0" tIns="0" rIns="0" bIns="0" rtlCol="0" anchor="ctr"/>
+          <a:lstStyle/>
+          <a:p>
+            <a:pPr indent="0" marL="0">
+              <a:buNone/>
+            </a:pPr>
+            <a:r>
+              <a:rPr lang="en-US" sz="1800" dirty="0">
+                <a:solidFill>
+                  <a:srgbClr val="4A6B5D"/>
+                </a:solidFill>
+                <a:latin typeface="Georgia" pitchFamily="34" charset="0"/>
+                <a:ea typeface="Georgia" pitchFamily="34" charset="-122"/>
+                <a:cs typeface="Georgia" pitchFamily="34" charset="-120"/>
+              </a:rPr>
+              <a:t>Gap</a:t>
+            </a:r>
+            <a:endParaRPr lang="en-US" sz="1800" dirty="0"/>
+          </a:p>
+        </p:txBody>
+      </p:sp>
+      <p:sp>
+        <p:nvSpPr>
+          <p:cNvPr id="8" name="Text 6"/>
+          <p:cNvSpPr/>
+          <p:nvPr/>
+        </p:nvSpPr>
+        <p:spPr>
+          <a:xfrm>
+            <a:off x="3108960" y="1645920"/>
+            <a:ext cx="4023360" cy="713232"/>
+          </a:xfrm>
+          <a:prstGeom prst="rect">
+            <a:avLst/>
+          </a:prstGeom>
+          <a:noFill/>
+          <a:ln/>
+        </p:spPr>
+        <p:txBody>
+          <a:bodyPr wrap="square" lIns="0" tIns="0" rIns="0" bIns="0" rtlCol="0" anchor="ctr"/>
+          <a:lstStyle/>
+          <a:p>
+            <a:pPr indent="0" marL="0">
+              <a:lnSpc>
+                <a:spcPts val="1700"/>
+              </a:lnSpc>
+              <a:buNone/>
+            </a:pPr>
+            <a:r>
+              <a:rPr lang="en-US" sz="1350" dirty="0">
+                <a:solidFill>
+                  <a:srgbClr val="24313F"/>
+                </a:solidFill>
+                <a:latin typeface="Georgia" pitchFamily="34" charset="0"/>
+                <a:ea typeface="Georgia" pitchFamily="34" charset="-122"/>
+                <a:cs typeface="Georgia" pitchFamily="34" charset="-120"/>
+              </a:rPr>
+              <a:t>in AO language: which objective is the shortfall</a:t>
+            </a:r>
+            <a:endParaRPr lang="en-US" sz="1350" dirty="0"/>
+          </a:p>
+        </p:txBody>
+      </p:sp>
+      <p:sp>
+        <p:nvSpPr>
+          <p:cNvPr id="9" name="Shape 7"/>
+          <p:cNvSpPr/>
+          <p:nvPr/>
+        </p:nvSpPr>
+        <p:spPr>
+          <a:xfrm>
+            <a:off x="822960" y="2359152"/>
+            <a:ext cx="6309360" cy="0"/>
+          </a:xfrm>
+          <a:prstGeom prst="line">
+            <a:avLst/>
+          </a:prstGeom>
+          <a:noFill/>
+          <a:ln w="9525">
+            <a:solidFill>
+              <a:srgbClr val="D9D4C4"/>
+            </a:solidFill>
+            <a:prstDash val="solid"/>
+          </a:ln>
+        </p:spPr>
+      </p:sp>
+      <p:sp>
+        <p:nvSpPr>
+          <p:cNvPr id="10" name="Text 8"/>
+          <p:cNvSpPr/>
+          <p:nvPr/>
+        </p:nvSpPr>
+        <p:spPr>
+          <a:xfrm>
+            <a:off x="822960" y="2359152"/>
+            <a:ext cx="2194560" cy="713232"/>
+          </a:xfrm>
+          <a:prstGeom prst="rect">
+            <a:avLst/>
+          </a:prstGeom>
+          <a:noFill/>
+          <a:ln/>
+        </p:spPr>
+        <p:txBody>
+          <a:bodyPr wrap="square" lIns="0" tIns="0" rIns="0" bIns="0" rtlCol="0" anchor="ctr"/>
+          <a:lstStyle/>
+          <a:p>
+            <a:pPr indent="0" marL="0">
+              <a:buNone/>
+            </a:pPr>
+            <a:r>
+              <a:rPr lang="en-US" sz="1800" dirty="0">
+                <a:solidFill>
+                  <a:srgbClr val="4A6B5D"/>
+                </a:solidFill>
+                <a:latin typeface="Georgia" pitchFamily="34" charset="0"/>
+                <a:ea typeface="Georgia" pitchFamily="34" charset="-122"/>
+                <a:cs typeface="Georgia" pitchFamily="34" charset="-120"/>
+              </a:rPr>
+              <a:t>Evidence</a:t>
+            </a:r>
+            <a:endParaRPr lang="en-US" sz="1800" dirty="0"/>
+          </a:p>
+        </p:txBody>
+      </p:sp>
+      <p:sp>
+        <p:nvSpPr>
+          <p:cNvPr id="11" name="Text 9"/>
+          <p:cNvSpPr/>
+          <p:nvPr/>
+        </p:nvSpPr>
+        <p:spPr>
+          <a:xfrm>
+            <a:off x="3108960" y="2359152"/>
+            <a:ext cx="4023360" cy="713232"/>
+          </a:xfrm>
+          <a:prstGeom prst="rect">
+            <a:avLst/>
+          </a:prstGeom>
+          <a:noFill/>
+          <a:ln/>
+        </p:spPr>
+        <p:txBody>
+          <a:bodyPr wrap="square" lIns="0" tIns="0" rIns="0" bIns="0" rtlCol="0" anchor="ctr"/>
+          <a:lstStyle/>
+          <a:p>
+            <a:pPr indent="0" marL="0">
+              <a:lnSpc>
+                <a:spcPts val="1700"/>
+              </a:lnSpc>
+              <a:buNone/>
+            </a:pPr>
+            <a:r>
+              <a:rPr lang="en-US" sz="1350" dirty="0">
+                <a:solidFill>
+                  <a:srgbClr val="24313F"/>
+                </a:solidFill>
+                <a:latin typeface="Georgia" pitchFamily="34" charset="0"/>
+                <a:ea typeface="Georgia" pitchFamily="34" charset="-122"/>
+                <a:cs typeface="Georgia" pitchFamily="34" charset="-120"/>
+              </a:rPr>
+              <a:t>script plus the semester data: A1, A4, EoT</a:t>
+            </a:r>
+            <a:endParaRPr lang="en-US" sz="1350" dirty="0"/>
+          </a:p>
+        </p:txBody>
+      </p:sp>
+      <p:sp>
+        <p:nvSpPr>
+          <p:cNvPr id="12" name="Shape 10"/>
+          <p:cNvSpPr/>
+          <p:nvPr/>
+        </p:nvSpPr>
+        <p:spPr>
+          <a:xfrm>
+            <a:off x="822960" y="3072384"/>
+            <a:ext cx="6309360" cy="0"/>
+          </a:xfrm>
+          <a:prstGeom prst="line">
+            <a:avLst/>
+          </a:prstGeom>
+          <a:noFill/>
+          <a:ln w="9525">
+            <a:solidFill>
+              <a:srgbClr val="D9D4C4"/>
+            </a:solidFill>
+            <a:prstDash val="solid"/>
+          </a:ln>
+        </p:spPr>
+      </p:sp>
+      <p:sp>
+        <p:nvSpPr>
+          <p:cNvPr id="13" name="Text 11"/>
+          <p:cNvSpPr/>
+          <p:nvPr/>
+        </p:nvSpPr>
+        <p:spPr>
+          <a:xfrm>
+            <a:off x="822960" y="3072384"/>
+            <a:ext cx="2194560" cy="713232"/>
+          </a:xfrm>
+          <a:prstGeom prst="rect">
+            <a:avLst/>
+          </a:prstGeom>
+          <a:noFill/>
+          <a:ln/>
+        </p:spPr>
+        <p:txBody>
+          <a:bodyPr wrap="square" lIns="0" tIns="0" rIns="0" bIns="0" rtlCol="0" anchor="ctr"/>
+          <a:lstStyle/>
+          <a:p>
+            <a:pPr indent="0" marL="0">
+              <a:buNone/>
+            </a:pPr>
+            <a:r>
+              <a:rPr lang="en-US" sz="1800" dirty="0">
+                <a:solidFill>
+                  <a:srgbClr val="4A6B5D"/>
+                </a:solidFill>
+                <a:latin typeface="Georgia" pitchFamily="34" charset="0"/>
+                <a:ea typeface="Georgia" pitchFamily="34" charset="-122"/>
+                <a:cs typeface="Georgia" pitchFamily="34" charset="-120"/>
+              </a:rPr>
+              <a:t>Action</a:t>
+            </a:r>
+            <a:endParaRPr lang="en-US" sz="1800" dirty="0"/>
+          </a:p>
+        </p:txBody>
+      </p:sp>
+      <p:sp>
+        <p:nvSpPr>
+          <p:cNvPr id="14" name="Text 12"/>
+          <p:cNvSpPr/>
+          <p:nvPr/>
+        </p:nvSpPr>
+        <p:spPr>
+          <a:xfrm>
+            <a:off x="3108960" y="3072384"/>
+            <a:ext cx="4023360" cy="713232"/>
+          </a:xfrm>
+          <a:prstGeom prst="rect">
+            <a:avLst/>
+          </a:prstGeom>
+          <a:noFill/>
+          <a:ln/>
+        </p:spPr>
+        <p:txBody>
+          <a:bodyPr wrap="square" lIns="0" tIns="0" rIns="0" bIns="0" rtlCol="0" anchor="ctr"/>
+          <a:lstStyle/>
+          <a:p>
+            <a:pPr indent="0" marL="0">
+              <a:lnSpc>
+                <a:spcPts val="1700"/>
+              </a:lnSpc>
+              <a:buNone/>
+            </a:pPr>
+            <a:r>
+              <a:rPr lang="en-US" sz="1350" dirty="0">
+                <a:solidFill>
+                  <a:srgbClr val="24313F"/>
+                </a:solidFill>
+                <a:latin typeface="Georgia" pitchFamily="34" charset="0"/>
+                <a:ea typeface="Georgia" pitchFamily="34" charset="-122"/>
+                <a:cs typeface="Georgia" pitchFamily="34" charset="-120"/>
+              </a:rPr>
+              <a:t>specific and Semester 2 shaped, not a resolution</a:t>
+            </a:r>
+            <a:endParaRPr lang="en-US" sz="1350" dirty="0"/>
+          </a:p>
+        </p:txBody>
+      </p:sp>
+      <p:sp>
+        <p:nvSpPr>
+          <p:cNvPr id="15" name="Shape 13"/>
+          <p:cNvSpPr/>
+          <p:nvPr/>
+        </p:nvSpPr>
+        <p:spPr>
+          <a:xfrm>
+            <a:off x="822960" y="3785616"/>
+            <a:ext cx="6309360" cy="0"/>
+          </a:xfrm>
+          <a:prstGeom prst="line">
+            <a:avLst/>
+          </a:prstGeom>
+          <a:noFill/>
+          <a:ln w="9525">
+            <a:solidFill>
+              <a:srgbClr val="D9D4C4"/>
+            </a:solidFill>
+            <a:prstDash val="solid"/>
+          </a:ln>
+        </p:spPr>
+      </p:sp>
+      <p:sp>
+        <p:nvSpPr>
+          <p:cNvPr id="16" name="Text 14"/>
+          <p:cNvSpPr/>
+          <p:nvPr/>
+        </p:nvSpPr>
+        <p:spPr>
+          <a:xfrm>
+            <a:off x="822960" y="3785616"/>
+            <a:ext cx="2194560" cy="713232"/>
+          </a:xfrm>
+          <a:prstGeom prst="rect">
+            <a:avLst/>
+          </a:prstGeom>
+          <a:noFill/>
+          <a:ln/>
+        </p:spPr>
+        <p:txBody>
+          <a:bodyPr wrap="square" lIns="0" tIns="0" rIns="0" bIns="0" rtlCol="0" anchor="ctr"/>
+          <a:lstStyle/>
+          <a:p>
+            <a:pPr indent="0" marL="0">
+              <a:buNone/>
+            </a:pPr>
+            <a:r>
+              <a:rPr lang="en-US" sz="1800" dirty="0">
+                <a:solidFill>
+                  <a:srgbClr val="4A6B5D"/>
+                </a:solidFill>
+                <a:latin typeface="Georgia" pitchFamily="34" charset="0"/>
+                <a:ea typeface="Georgia" pitchFamily="34" charset="-122"/>
+                <a:cs typeface="Georgia" pitchFamily="34" charset="-120"/>
+              </a:rPr>
+              <a:t>Review date</a:t>
+            </a:r>
+            <a:endParaRPr lang="en-US" sz="1800" dirty="0"/>
+          </a:p>
+        </p:txBody>
+      </p:sp>
+      <p:sp>
+        <p:nvSpPr>
+          <p:cNvPr id="17" name="Text 15"/>
+          <p:cNvSpPr/>
+          <p:nvPr/>
+        </p:nvSpPr>
+        <p:spPr>
+          <a:xfrm>
+            <a:off x="3108960" y="3785616"/>
+            <a:ext cx="4023360" cy="713232"/>
+          </a:xfrm>
+          <a:prstGeom prst="rect">
+            <a:avLst/>
+          </a:prstGeom>
+          <a:noFill/>
+          <a:ln/>
+        </p:spPr>
+        <p:txBody>
+          <a:bodyPr wrap="square" lIns="0" tIns="0" rIns="0" bIns="0" rtlCol="0" anchor="ctr"/>
+          <a:lstStyle/>
+          <a:p>
+            <a:pPr indent="0" marL="0">
+              <a:lnSpc>
+                <a:spcPts val="1700"/>
+              </a:lnSpc>
+              <a:buNone/>
+            </a:pPr>
+            <a:r>
+              <a:rPr lang="en-US" sz="1350" dirty="0">
+                <a:solidFill>
+                  <a:srgbClr val="24313F"/>
+                </a:solidFill>
+                <a:latin typeface="Georgia" pitchFamily="34" charset="0"/>
+                <a:ea typeface="Georgia" pitchFamily="34" charset="-122"/>
+                <a:cs typeface="Georgia" pitchFamily="34" charset="-120"/>
+              </a:rPr>
+              <a:t>a named S2 week, before the first S2 attainment</a:t>
+            </a:r>
+            <a:endParaRPr lang="en-US" sz="1350" dirty="0"/>
+          </a:p>
+        </p:txBody>
+      </p:sp>
+      <p:sp>
+        <p:nvSpPr>
+          <p:cNvPr id="18" name="Shape 16"/>
+          <p:cNvSpPr/>
+          <p:nvPr/>
+        </p:nvSpPr>
+        <p:spPr>
+          <a:xfrm>
+            <a:off x="822960" y="4498848"/>
+            <a:ext cx="6309360" cy="0"/>
+          </a:xfrm>
+          <a:prstGeom prst="line">
+            <a:avLst/>
+          </a:prstGeom>
+          <a:noFill/>
+          <a:ln w="9525">
+            <a:solidFill>
+              <a:srgbClr val="D9D4C4"/>
+            </a:solidFill>
+            <a:prstDash val="solid"/>
+          </a:ln>
+        </p:spPr>
+      </p:sp>
+      <p:sp>
+        <p:nvSpPr>
+          <p:cNvPr id="19" name="Text 17"/>
+          <p:cNvSpPr/>
+          <p:nvPr/>
+        </p:nvSpPr>
+        <p:spPr>
+          <a:xfrm>
+            <a:off x="822960" y="4636008"/>
+            <a:ext cx="6309360" cy="548640"/>
+          </a:xfrm>
+          <a:prstGeom prst="rect">
+            <a:avLst/>
+          </a:prstGeom>
+          <a:noFill/>
+          <a:ln/>
+        </p:spPr>
+        <p:txBody>
+          <a:bodyPr wrap="square" lIns="0" tIns="0" rIns="0" bIns="0" rtlCol="0" anchor="t"/>
+          <a:lstStyle/>
+          <a:p>
+            <a:pPr indent="0" marL="0">
+              <a:lnSpc>
+                <a:spcPts val="1500"/>
+              </a:lnSpc>
+              <a:buNone/>
+            </a:pPr>
+            <a:r>
+              <a:rPr lang="en-US" sz="1150" i="1" dirty="0">
+                <a:solidFill>
+                  <a:srgbClr val="7A7F72"/>
+                </a:solidFill>
+                <a:latin typeface="Arial" pitchFamily="34" charset="0"/>
+                <a:ea typeface="Arial" pitchFamily="34" charset="-122"/>
+                <a:cs typeface="Arial" pitchFamily="34" charset="-120"/>
+              </a:rPr>
+              <a:t>Built to survive being read in February by the person who wrote it in January. Posted as LB7.</a:t>
+            </a:r>
+            <a:endParaRPr lang="en-US" sz="1150" dirty="0"/>
+          </a:p>
+        </p:txBody>
+      </p:sp>
+      <p:sp>
+        <p:nvSpPr>
+          <p:cNvPr id="20" name="Shape 18"/>
+          <p:cNvSpPr/>
+          <p:nvPr/>
+        </p:nvSpPr>
+        <p:spPr>
+          <a:xfrm>
+            <a:off x="7360920" y="1417320"/>
+            <a:ext cx="4023360" cy="4114800"/>
+          </a:xfrm>
+          <a:prstGeom prst="rect">
+            <a:avLst/>
+          </a:prstGeom>
+          <a:solidFill>
+            <a:srgbClr val="E8EFE7"/>
+          </a:solidFill>
+          <a:ln w="12700">
+            <a:solidFill>
+              <a:srgbClr val="8AA394"/>
+            </a:solidFill>
+            <a:prstDash val="solid"/>
+          </a:ln>
+        </p:spPr>
+      </p:sp>
+      <p:sp>
+        <p:nvSpPr>
+          <p:cNvPr id="21" name="Text 19"/>
+          <p:cNvSpPr/>
+          <p:nvPr/>
+        </p:nvSpPr>
+        <p:spPr>
+          <a:xfrm>
+            <a:off x="7589520" y="1600200"/>
+            <a:ext cx="3566160" cy="274320"/>
+          </a:xfrm>
+          <a:prstGeom prst="rect">
+            <a:avLst/>
+          </a:prstGeom>
+          <a:noFill/>
+          <a:ln/>
+        </p:spPr>
+        <p:txBody>
+          <a:bodyPr wrap="square" lIns="0" tIns="0" rIns="0" bIns="0" rtlCol="0" anchor="ctr"/>
+          <a:lstStyle/>
+          <a:p>
+            <a:pPr indent="0" marL="0">
+              <a:buNone/>
+            </a:pPr>
+            <a:r>
+              <a:rPr lang="en-US" sz="950" b="1" spc="150" kern="0" dirty="0">
+                <a:solidFill>
+                  <a:srgbClr val="7A7F72"/>
+                </a:solidFill>
+                <a:latin typeface="Arial" pitchFamily="34" charset="0"/>
+                <a:ea typeface="Arial" pitchFamily="34" charset="-122"/>
+                <a:cs typeface="Arial" pitchFamily="34" charset="-120"/>
+              </a:rPr>
+              <a:t>WORKED EXEMPLAR (FICTIONAL)</a:t>
+            </a:r>
+            <a:endParaRPr lang="en-US" sz="950" dirty="0"/>
+          </a:p>
+        </p:txBody>
+      </p:sp>
+      <p:sp>
+        <p:nvSpPr>
+          <p:cNvPr id="22" name="Text 20"/>
+          <p:cNvSpPr/>
+          <p:nvPr/>
+        </p:nvSpPr>
+        <p:spPr>
+          <a:xfrm>
+            <a:off x="7589520" y="1965960"/>
+            <a:ext cx="1188720" cy="822960"/>
+          </a:xfrm>
+          <a:prstGeom prst="rect">
+            <a:avLst/>
+          </a:prstGeom>
+          <a:noFill/>
+          <a:ln/>
+        </p:spPr>
+        <p:txBody>
+          <a:bodyPr wrap="square" lIns="0" tIns="0" rIns="0" bIns="0" rtlCol="0" anchor="t"/>
+          <a:lstStyle/>
+          <a:p>
+            <a:pPr indent="0" marL="0">
+              <a:buNone/>
+            </a:pPr>
+            <a:r>
+              <a:rPr lang="en-US" sz="1050" b="1" dirty="0">
+                <a:solidFill>
+                  <a:srgbClr val="4A6B5D"/>
+                </a:solidFill>
+                <a:latin typeface="Arial" pitchFamily="34" charset="0"/>
+                <a:ea typeface="Arial" pitchFamily="34" charset="-122"/>
+                <a:cs typeface="Arial" pitchFamily="34" charset="-120"/>
+              </a:rPr>
+              <a:t>Gap</a:t>
+            </a:r>
+            <a:endParaRPr lang="en-US" sz="1050" dirty="0"/>
+          </a:p>
+        </p:txBody>
+      </p:sp>
+      <p:sp>
+        <p:nvSpPr>
+          <p:cNvPr id="23" name="Text 21"/>
+          <p:cNvSpPr/>
+          <p:nvPr/>
+        </p:nvSpPr>
+        <p:spPr>
+          <a:xfrm>
+            <a:off x="8778240" y="1965960"/>
+            <a:ext cx="2468880" cy="868680"/>
+          </a:xfrm>
+          <a:prstGeom prst="rect">
+            <a:avLst/>
+          </a:prstGeom>
+          <a:noFill/>
+          <a:ln/>
+        </p:spPr>
+        <p:txBody>
+          <a:bodyPr wrap="square" lIns="0" tIns="0" rIns="0" bIns="0" rtlCol="0" anchor="t"/>
+          <a:lstStyle/>
+          <a:p>
+            <a:pPr indent="0" marL="0">
+              <a:lnSpc>
+                <a:spcPts val="1500"/>
+              </a:lnSpc>
+              <a:buNone/>
+            </a:pPr>
+            <a:r>
+              <a:rPr lang="en-US" sz="1200" i="1" dirty="0">
+                <a:solidFill>
+                  <a:srgbClr val="24313F"/>
+                </a:solidFill>
+                <a:latin typeface="Georgia" pitchFamily="34" charset="0"/>
+                <a:ea typeface="Georgia" pitchFamily="34" charset="-122"/>
+                <a:cs typeface="Georgia" pitchFamily="34" charset="-120"/>
+              </a:rPr>
+              <a:t>AO1 contexts: my case-study facts were pre-2020.</a:t>
+            </a:r>
+            <a:endParaRPr lang="en-US" sz="1200" dirty="0"/>
+          </a:p>
+        </p:txBody>
+      </p:sp>
+      <p:sp>
+        <p:nvSpPr>
+          <p:cNvPr id="24" name="Text 22"/>
+          <p:cNvSpPr/>
+          <p:nvPr/>
+        </p:nvSpPr>
+        <p:spPr>
+          <a:xfrm>
+            <a:off x="7589520" y="2862072"/>
+            <a:ext cx="1188720" cy="822960"/>
+          </a:xfrm>
+          <a:prstGeom prst="rect">
+            <a:avLst/>
+          </a:prstGeom>
+          <a:noFill/>
+          <a:ln/>
+        </p:spPr>
+        <p:txBody>
+          <a:bodyPr wrap="square" lIns="0" tIns="0" rIns="0" bIns="0" rtlCol="0" anchor="t"/>
+          <a:lstStyle/>
+          <a:p>
+            <a:pPr indent="0" marL="0">
+              <a:buNone/>
+            </a:pPr>
+            <a:r>
+              <a:rPr lang="en-US" sz="1050" b="1" dirty="0">
+                <a:solidFill>
+                  <a:srgbClr val="4A6B5D"/>
+                </a:solidFill>
+                <a:latin typeface="Arial" pitchFamily="34" charset="0"/>
+                <a:ea typeface="Arial" pitchFamily="34" charset="-122"/>
+                <a:cs typeface="Arial" pitchFamily="34" charset="-120"/>
+              </a:rPr>
+              <a:t>Evidence</a:t>
+            </a:r>
+            <a:endParaRPr lang="en-US" sz="1050" dirty="0"/>
+          </a:p>
+        </p:txBody>
+      </p:sp>
+      <p:sp>
+        <p:nvSpPr>
+          <p:cNvPr id="25" name="Text 23"/>
+          <p:cNvSpPr/>
+          <p:nvPr/>
+        </p:nvSpPr>
+        <p:spPr>
+          <a:xfrm>
+            <a:off x="8778240" y="2862072"/>
+            <a:ext cx="2468880" cy="868680"/>
+          </a:xfrm>
+          <a:prstGeom prst="rect">
+            <a:avLst/>
+          </a:prstGeom>
+          <a:noFill/>
+          <a:ln/>
+        </p:spPr>
+        <p:txBody>
+          <a:bodyPr wrap="square" lIns="0" tIns="0" rIns="0" bIns="0" rtlCol="0" anchor="t"/>
+          <a:lstStyle/>
+          <a:p>
+            <a:pPr indent="0" marL="0">
+              <a:lnSpc>
+                <a:spcPts val="1500"/>
+              </a:lnSpc>
+              <a:buNone/>
+            </a:pPr>
+            <a:r>
+              <a:rPr lang="en-US" sz="1200" i="1" dirty="0">
+                <a:solidFill>
+                  <a:srgbClr val="24313F"/>
+                </a:solidFill>
+                <a:latin typeface="Georgia" pitchFamily="34" charset="0"/>
+                <a:ea typeface="Georgia" pitchFamily="34" charset="-122"/>
+                <a:cs typeface="Georgia" pitchFamily="34" charset="-120"/>
+              </a:rPr>
+              <a:t>EoT Section B, criterion 2 at band 3; A4 the same.</a:t>
+            </a:r>
+            <a:endParaRPr lang="en-US" sz="1200" dirty="0"/>
+          </a:p>
+        </p:txBody>
+      </p:sp>
+      <p:sp>
+        <p:nvSpPr>
+          <p:cNvPr id="26" name="Text 24"/>
+          <p:cNvSpPr/>
+          <p:nvPr/>
+        </p:nvSpPr>
+        <p:spPr>
+          <a:xfrm>
+            <a:off x="7589520" y="3758184"/>
+            <a:ext cx="1188720" cy="822960"/>
+          </a:xfrm>
+          <a:prstGeom prst="rect">
+            <a:avLst/>
+          </a:prstGeom>
+          <a:noFill/>
+          <a:ln/>
+        </p:spPr>
+        <p:txBody>
+          <a:bodyPr wrap="square" lIns="0" tIns="0" rIns="0" bIns="0" rtlCol="0" anchor="t"/>
+          <a:lstStyle/>
+          <a:p>
+            <a:pPr indent="0" marL="0">
+              <a:buNone/>
+            </a:pPr>
+            <a:r>
+              <a:rPr lang="en-US" sz="1050" b="1" dirty="0">
+                <a:solidFill>
+                  <a:srgbClr val="4A6B5D"/>
+                </a:solidFill>
+                <a:latin typeface="Arial" pitchFamily="34" charset="0"/>
+                <a:ea typeface="Arial" pitchFamily="34" charset="-122"/>
+                <a:cs typeface="Arial" pitchFamily="34" charset="-120"/>
+              </a:rPr>
+              <a:t>Action</a:t>
+            </a:r>
+            <a:endParaRPr lang="en-US" sz="1050" dirty="0"/>
+          </a:p>
+        </p:txBody>
+      </p:sp>
+      <p:sp>
+        <p:nvSpPr>
+          <p:cNvPr id="27" name="Text 25"/>
+          <p:cNvSpPr/>
+          <p:nvPr/>
+        </p:nvSpPr>
+        <p:spPr>
+          <a:xfrm>
+            <a:off x="8778240" y="3758184"/>
+            <a:ext cx="2468880" cy="868680"/>
+          </a:xfrm>
+          <a:prstGeom prst="rect">
+            <a:avLst/>
+          </a:prstGeom>
+          <a:noFill/>
+          <a:ln/>
+        </p:spPr>
+        <p:txBody>
+          <a:bodyPr wrap="square" lIns="0" tIns="0" rIns="0" bIns="0" rtlCol="0" anchor="t"/>
+          <a:lstStyle/>
+          <a:p>
+            <a:pPr indent="0" marL="0">
+              <a:lnSpc>
+                <a:spcPts val="1500"/>
+              </a:lnSpc>
+              <a:buNone/>
+            </a:pPr>
+            <a:r>
+              <a:rPr lang="en-US" sz="1200" i="1" dirty="0">
+                <a:solidFill>
+                  <a:srgbClr val="24313F"/>
+                </a:solidFill>
+                <a:latin typeface="Georgia" pitchFamily="34" charset="0"/>
+                <a:ea typeface="Georgia" pitchFamily="34" charset="-122"/>
+                <a:cs typeface="Georgia" pitchFamily="34" charset="-120"/>
+              </a:rPr>
+              <a:t>Rebuild the document's dated-facts row from this year's coverage, two entries a week.</a:t>
+            </a:r>
+            <a:endParaRPr lang="en-US" sz="1200" dirty="0"/>
+          </a:p>
+        </p:txBody>
+      </p:sp>
+      <p:sp>
+        <p:nvSpPr>
+          <p:cNvPr id="28" name="Text 26"/>
+          <p:cNvSpPr/>
+          <p:nvPr/>
+        </p:nvSpPr>
+        <p:spPr>
+          <a:xfrm>
+            <a:off x="7589520" y="4654296"/>
+            <a:ext cx="1188720" cy="822960"/>
+          </a:xfrm>
+          <a:prstGeom prst="rect">
+            <a:avLst/>
+          </a:prstGeom>
+          <a:noFill/>
+          <a:ln/>
+        </p:spPr>
+        <p:txBody>
+          <a:bodyPr wrap="square" lIns="0" tIns="0" rIns="0" bIns="0" rtlCol="0" anchor="t"/>
+          <a:lstStyle/>
+          <a:p>
+            <a:pPr indent="0" marL="0">
+              <a:buNone/>
+            </a:pPr>
+            <a:r>
+              <a:rPr lang="en-US" sz="1050" b="1" dirty="0">
+                <a:solidFill>
+                  <a:srgbClr val="4A6B5D"/>
+                </a:solidFill>
+                <a:latin typeface="Arial" pitchFamily="34" charset="0"/>
+                <a:ea typeface="Arial" pitchFamily="34" charset="-122"/>
+                <a:cs typeface="Arial" pitchFamily="34" charset="-120"/>
+              </a:rPr>
+              <a:t>Review date</a:t>
+            </a:r>
+            <a:endParaRPr lang="en-US" sz="1050" dirty="0"/>
+          </a:p>
+        </p:txBody>
+      </p:sp>
+      <p:sp>
+        <p:nvSpPr>
+          <p:cNvPr id="29" name="Text 27"/>
+          <p:cNvSpPr/>
+          <p:nvPr/>
+        </p:nvSpPr>
+        <p:spPr>
+          <a:xfrm>
+            <a:off x="8778240" y="4654296"/>
+            <a:ext cx="2468880" cy="868680"/>
+          </a:xfrm>
+          <a:prstGeom prst="rect">
+            <a:avLst/>
+          </a:prstGeom>
+          <a:noFill/>
+          <a:ln/>
+        </p:spPr>
+        <p:txBody>
+          <a:bodyPr wrap="square" lIns="0" tIns="0" rIns="0" bIns="0" rtlCol="0" anchor="t"/>
+          <a:lstStyle/>
+          <a:p>
+            <a:pPr indent="0" marL="0">
+              <a:lnSpc>
+                <a:spcPts val="1500"/>
+              </a:lnSpc>
+              <a:buNone/>
+            </a:pPr>
+            <a:r>
+              <a:rPr lang="en-US" sz="1200" i="1" dirty="0">
+                <a:solidFill>
+                  <a:srgbClr val="24313F"/>
+                </a:solidFill>
+                <a:latin typeface="Georgia" pitchFamily="34" charset="0"/>
+                <a:ea typeface="Georgia" pitchFamily="34" charset="-122"/>
+                <a:cs typeface="Georgia" pitchFamily="34" charset="-120"/>
+              </a:rPr>
+              <a:t>W3 of Semester 2, before the first S2 attainment.</a:t>
+            </a:r>
+            <a:endParaRPr lang="en-US" sz="1200" dirty="0"/>
+          </a:p>
+        </p:txBody>
+      </p:sp>
+      <p:sp>
+        <p:nvSpPr>
+          <p:cNvPr id="30" name="Shape 28"/>
+          <p:cNvSpPr/>
+          <p:nvPr/>
+        </p:nvSpPr>
+        <p:spPr>
+          <a:xfrm>
+            <a:off x="822960" y="6382512"/>
+            <a:ext cx="10543032" cy="0"/>
+          </a:xfrm>
+          <a:prstGeom prst="line">
+            <a:avLst/>
+          </a:prstGeom>
+          <a:noFill/>
+          <a:ln w="9525">
+            <a:solidFill>
+              <a:srgbClr val="D9D4C4"/>
+            </a:solidFill>
+            <a:prstDash val="solid"/>
+          </a:ln>
+        </p:spPr>
+      </p:sp>
+      <p:sp>
+        <p:nvSpPr>
+          <p:cNvPr id="31" name="Text 29"/>
+          <p:cNvSpPr/>
+          <p:nvPr/>
+        </p:nvSpPr>
+        <p:spPr>
+          <a:xfrm>
+            <a:off x="822960" y="6419088"/>
+            <a:ext cx="7315200" cy="274320"/>
+          </a:xfrm>
+          <a:prstGeom prst="rect">
+            <a:avLst/>
+          </a:prstGeom>
+          <a:noFill/>
+          <a:ln/>
+        </p:spPr>
+        <p:txBody>
+          <a:bodyPr wrap="square" lIns="0" tIns="0" rIns="0" bIns="0" rtlCol="0" anchor="ctr"/>
+          <a:lstStyle/>
+          <a:p>
+            <a:pPr indent="0" marL="0">
+              <a:buNone/>
+            </a:pPr>
+            <a:r>
+              <a:rPr lang="en-US" sz="900" spc="150" kern="0" dirty="0">
+                <a:solidFill>
+                  <a:srgbClr val="7A7F72"/>
+                </a:solidFill>
+                <a:latin typeface="Arial" pitchFamily="34" charset="0"/>
+                <a:ea typeface="Arial" pitchFamily="34" charset="-122"/>
+                <a:cs typeface="Arial" pitchFamily="34" charset="-120"/>
+              </a:rPr>
+              <a:t>MEDIA STUDIES 9607 · SEMESTER I</a:t>
+            </a:r>
+            <a:endParaRPr lang="en-US" sz="900" dirty="0"/>
+          </a:p>
+        </p:txBody>
+      </p:sp>
+      <p:sp>
+        <p:nvSpPr>
+          <p:cNvPr id="32" name="Text 30"/>
+          <p:cNvSpPr/>
+          <p:nvPr/>
+        </p:nvSpPr>
+        <p:spPr>
+          <a:xfrm>
+            <a:off x="10268712" y="6355080"/>
+            <a:ext cx="1097280" cy="365760"/>
+          </a:xfrm>
+          <a:prstGeom prst="rect">
+            <a:avLst/>
+          </a:prstGeom>
+          <a:noFill/>
+          <a:ln/>
+        </p:spPr>
+        <p:txBody>
+          <a:bodyPr wrap="square" lIns="0" tIns="0" rIns="0" bIns="0" rtlCol="0" anchor="ctr"/>
+          <a:lstStyle/>
+          <a:p>
+            <a:pPr algn="r" indent="0" marL="0">
+              <a:buNone/>
+            </a:pPr>
+            <a:r>
+              <a:rPr lang="en-US" sz="1600" dirty="0">
+                <a:solidFill>
+                  <a:srgbClr val="A3C1AD"/>
+                </a:solidFill>
+                <a:latin typeface="Georgia" pitchFamily="34" charset="0"/>
+                <a:ea typeface="Georgia" pitchFamily="34" charset="-122"/>
+                <a:cs typeface="Georgia" pitchFamily="34" charset="-120"/>
+              </a:rPr>
+              <a:t>04</a:t>
+            </a:r>
+            <a:endParaRPr lang="en-US" sz="1600" dirty="0"/>
+          </a:p>
+        </p:txBody>
+      </p:sp>
+    </p:spTree>
+  </p:cSld>
+  <p:clrMapOvr>
+    <a:masterClrMapping/>
+  </p:clrMapOvr>
+</p:sld>
+</file>
+
+<file path=ppt/slides/slide9.xml><?xml version="1.0" encoding="utf-8"?>
+<p:sld xmlns:a="http://schemas.openxmlformats.org/drawingml/2006/main" xmlns:r="http://schemas.openxmlformats.org/officeDocument/2006/relationships" xmlns:p="http://schemas.openxmlformats.org/presentationml/2006/main">
+  <p:cSld name="Slide 9">
     <p:bg>
       <p:bgPr>
         <a:solidFill>
@@ -4491,34 +6014,34 @@
         </p:nvSpPr>
         <p:spPr>
           <a:xfrm>
-            <a:off x="502920" y="548640"/>
-            <a:ext cx="1828800" cy="1828800"/>
-          </a:xfrm>
-          <a:prstGeom prst="rect">
-            <a:avLst/>
-          </a:prstGeom>
-          <a:noFill/>
-          <a:ln/>
-        </p:spPr>
-        <p:txBody>
-          <a:bodyPr wrap="square" lIns="0" tIns="0" rIns="0" bIns="0" rtlCol="0" anchor="t"/>
-          <a:lstStyle/>
-          <a:p>
-            <a:pPr indent="0" marL="0">
-              <a:buNone/>
-            </a:pPr>
-            <a:r>
-              <a:rPr lang="en-US" sz="20000" dirty="0">
-                <a:solidFill>
-                  <a:srgbClr val="A3C1AD"/>
-                </a:solidFill>
-                <a:latin typeface="Georgia" pitchFamily="34" charset="0"/>
-                <a:ea typeface="Georgia" pitchFamily="34" charset="-122"/>
-                <a:cs typeface="Georgia" pitchFamily="34" charset="-120"/>
-              </a:rPr>
-              <a:t>“</a:t>
-            </a:r>
-            <a:endParaRPr lang="en-US" sz="20000" dirty="0"/>
+            <a:off x="822960" y="1554480"/>
+            <a:ext cx="7315200" cy="274320"/>
+          </a:xfrm>
+          <a:prstGeom prst="rect">
+            <a:avLst/>
+          </a:prstGeom>
+          <a:noFill/>
+          <a:ln/>
+        </p:spPr>
+        <p:txBody>
+          <a:bodyPr wrap="square" lIns="0" tIns="0" rIns="0" bIns="0" rtlCol="0" anchor="ctr"/>
+          <a:lstStyle/>
+          <a:p>
+            <a:pPr algn="l" indent="0" marL="0">
+              <a:buNone/>
+            </a:pPr>
+            <a:r>
+              <a:rPr lang="en-US" sz="1100" b="1" spc="250" kern="0" dirty="0">
+                <a:solidFill>
+                  <a:srgbClr val="4A6B5D"/>
+                </a:solidFill>
+                <a:latin typeface="Arial" pitchFamily="34" charset="0"/>
+                <a:ea typeface="Arial" pitchFamily="34" charset="-122"/>
+                <a:cs typeface="Arial" pitchFamily="34" charset="-120"/>
+              </a:rPr>
+              <a:t>SAID WITH THE NUMBERS</a:t>
+            </a:r>
+            <a:endParaRPr lang="en-US" sz="1100" dirty="0"/>
           </a:p>
         </p:txBody>
       </p:sp>
@@ -4530,7 +6053,7 @@
         </p:nvSpPr>
         <p:spPr>
           <a:xfrm>
-            <a:off x="822960" y="1920240"/>
+            <a:off x="822960" y="2103120"/>
             <a:ext cx="10424160" cy="2194560"/>
           </a:xfrm>
           <a:prstGeom prst="rect">
@@ -4640,386 +6163,9 @@
                 <a:ea typeface="Arial" pitchFamily="34" charset="-122"/>
                 <a:cs typeface="Arial" pitchFamily="34" charset="-120"/>
               </a:rPr>
-              <a:t>The distance between what you thought you wrote and what you scored: A1, A3, A4, EoT. For most of you it narrowed. Say that out loud, with the numbers.</a:t>
+              <a:t>The distance between what you thought you wrote and what you scored: A1, A4, EoT, the same five criteria each time. For most of you it narrowed. Say that out loud, with the numbers.</a:t>
             </a:r>
             <a:endParaRPr lang="en-US" sz="1350" dirty="0"/>
-          </a:p>
-        </p:txBody>
-      </p:sp>
-    </p:spTree>
-  </p:cSld>
-  <p:clrMapOvr>
-    <a:masterClrMapping/>
-  </p:clrMapOvr>
-</p:sld>
-</file>
-
-<file path=ppt/slides/slide9.xml><?xml version="1.0" encoding="utf-8"?>
-<p:sld xmlns:a="http://schemas.openxmlformats.org/drawingml/2006/main" xmlns:r="http://schemas.openxmlformats.org/officeDocument/2006/relationships" xmlns:p="http://schemas.openxmlformats.org/presentationml/2006/main">
-  <p:cSld name="Slide 9">
-    <p:bg>
-      <p:bgPr>
-        <a:solidFill>
-          <a:srgbClr val="FAF8F1"/>
-        </a:solidFill>
-      </p:bgPr>
-    </p:bg>
-    <p:spTree>
-      <p:nvGrpSpPr>
-        <p:cNvPr id="1" name=""/>
-        <p:cNvGrpSpPr/>
-        <p:nvPr/>
-      </p:nvGrpSpPr>
-      <p:grpSpPr>
-        <a:xfrm>
-          <a:off x="0" y="0"/>
-          <a:ext cx="0" cy="0"/>
-          <a:chOff x="0" y="0"/>
-          <a:chExt cx="0" cy="0"/>
-        </a:xfrm>
-      </p:grpSpPr>
-      <p:sp>
-        <p:nvSpPr>
-          <p:cNvPr id="2" name="Text 0"/>
-          <p:cNvSpPr/>
-          <p:nvPr/>
-        </p:nvSpPr>
-        <p:spPr>
-          <a:xfrm>
-            <a:off x="822960" y="457200"/>
-            <a:ext cx="6400800" cy="274320"/>
-          </a:xfrm>
-          <a:prstGeom prst="rect">
-            <a:avLst/>
-          </a:prstGeom>
-          <a:noFill/>
-          <a:ln/>
-        </p:spPr>
-        <p:txBody>
-          <a:bodyPr wrap="square" lIns="0" tIns="0" rIns="0" bIns="0" rtlCol="0" anchor="ctr"/>
-          <a:lstStyle/>
-          <a:p>
-            <a:pPr algn="l" indent="0" marL="0">
-              <a:buNone/>
-            </a:pPr>
-            <a:r>
-              <a:rPr lang="en-US" sz="1100" b="1" spc="250" kern="0" dirty="0">
-                <a:solidFill>
-                  <a:srgbClr val="4A6B5D"/>
-                </a:solidFill>
-                <a:latin typeface="Arial" pitchFamily="34" charset="0"/>
-                <a:ea typeface="Arial" pitchFamily="34" charset="-122"/>
-                <a:cs typeface="Arial" pitchFamily="34" charset="-120"/>
-              </a:rPr>
-              <a:t>THE CLOSE</a:t>
-            </a:r>
-            <a:endParaRPr lang="en-US" sz="1100" dirty="0"/>
-          </a:p>
-        </p:txBody>
-      </p:sp>
-      <p:sp>
-        <p:nvSpPr>
-          <p:cNvPr id="3" name="Text 1"/>
-          <p:cNvSpPr/>
-          <p:nvPr/>
-        </p:nvSpPr>
-        <p:spPr>
-          <a:xfrm>
-            <a:off x="6793992" y="457200"/>
-            <a:ext cx="4572000" cy="274320"/>
-          </a:xfrm>
-          <a:prstGeom prst="rect">
-            <a:avLst/>
-          </a:prstGeom>
-          <a:noFill/>
-          <a:ln/>
-        </p:spPr>
-        <p:txBody>
-          <a:bodyPr wrap="square" lIns="0" tIns="0" rIns="0" bIns="0" rtlCol="0" anchor="ctr"/>
-          <a:lstStyle/>
-          <a:p>
-            <a:pPr algn="r" indent="0" marL="0">
-              <a:buNone/>
-            </a:pPr>
-            <a:r>
-              <a:rPr lang="en-US" sz="1100" b="1" spc="250" kern="0" dirty="0">
-                <a:solidFill>
-                  <a:srgbClr val="7A7F72"/>
-                </a:solidFill>
-                <a:latin typeface="Arial" pitchFamily="34" charset="0"/>
-                <a:ea typeface="Arial" pitchFamily="34" charset="-122"/>
-                <a:cs typeface="Arial" pitchFamily="34" charset="-120"/>
-              </a:rPr>
-              <a:t>SEMESTER 2, PREVIEWED HONESTLY</a:t>
-            </a:r>
-            <a:endParaRPr lang="en-US" sz="1100" dirty="0"/>
-          </a:p>
-        </p:txBody>
-      </p:sp>
-      <p:sp>
-        <p:nvSpPr>
-          <p:cNvPr id="4" name="Shape 2"/>
-          <p:cNvSpPr/>
-          <p:nvPr/>
-        </p:nvSpPr>
-        <p:spPr>
-          <a:xfrm>
-            <a:off x="822960" y="786384"/>
-            <a:ext cx="10543032" cy="0"/>
-          </a:xfrm>
-          <a:prstGeom prst="line">
-            <a:avLst/>
-          </a:prstGeom>
-          <a:noFill/>
-          <a:ln w="9525">
-            <a:solidFill>
-              <a:srgbClr val="D9D4C4"/>
-            </a:solidFill>
-            <a:prstDash val="solid"/>
-          </a:ln>
-        </p:spPr>
-      </p:sp>
-      <p:sp>
-        <p:nvSpPr>
-          <p:cNvPr id="5" name="Text 3"/>
-          <p:cNvSpPr/>
-          <p:nvPr/>
-        </p:nvSpPr>
-        <p:spPr>
-          <a:xfrm>
-            <a:off x="822960" y="1188720"/>
-            <a:ext cx="10543032" cy="822960"/>
-          </a:xfrm>
-          <a:prstGeom prst="rect">
-            <a:avLst/>
-          </a:prstGeom>
-          <a:noFill/>
-          <a:ln/>
-        </p:spPr>
-        <p:txBody>
-          <a:bodyPr wrap="square" lIns="0" tIns="0" rIns="0" bIns="0" rtlCol="0" anchor="ctr"/>
-          <a:lstStyle/>
-          <a:p>
-            <a:pPr indent="0" marL="0">
-              <a:buNone/>
-            </a:pPr>
-            <a:r>
-              <a:rPr lang="en-US" sz="3200" dirty="0">
-                <a:solidFill>
-                  <a:srgbClr val="24313F"/>
-                </a:solidFill>
-                <a:latin typeface="Georgia" pitchFamily="34" charset="0"/>
-                <a:ea typeface="Georgia" pitchFamily="34" charset="-122"/>
-                <a:cs typeface="Georgia" pitchFamily="34" charset="-120"/>
-              </a:rPr>
-              <a:t>Two living artifacts cross the break</a:t>
-            </a:r>
-            <a:endParaRPr lang="en-US" sz="3200" dirty="0"/>
-          </a:p>
-        </p:txBody>
-      </p:sp>
-      <p:sp>
-        <p:nvSpPr>
-          <p:cNvPr id="6" name="Shape 4"/>
-          <p:cNvSpPr/>
-          <p:nvPr/>
-        </p:nvSpPr>
-        <p:spPr>
-          <a:xfrm>
-            <a:off x="822960" y="2286000"/>
-            <a:ext cx="914400" cy="0"/>
-          </a:xfrm>
-          <a:prstGeom prst="line">
-            <a:avLst/>
-          </a:prstGeom>
-          <a:noFill/>
-          <a:ln w="31750">
-            <a:solidFill>
-              <a:srgbClr val="8C3A38"/>
-            </a:solidFill>
-            <a:prstDash val="solid"/>
-          </a:ln>
-        </p:spPr>
-      </p:sp>
-      <p:sp>
-        <p:nvSpPr>
-          <p:cNvPr id="7" name="Text 5"/>
-          <p:cNvSpPr/>
-          <p:nvPr/>
-        </p:nvSpPr>
-        <p:spPr>
-          <a:xfrm>
-            <a:off x="822960" y="2514600"/>
-            <a:ext cx="9875520" cy="2103120"/>
-          </a:xfrm>
-          <a:prstGeom prst="rect">
-            <a:avLst/>
-          </a:prstGeom>
-          <a:noFill/>
-          <a:ln/>
-        </p:spPr>
-        <p:txBody>
-          <a:bodyPr wrap="square" lIns="0" tIns="0" rIns="0" bIns="0" rtlCol="0" anchor="t"/>
-          <a:lstStyle/>
-          <a:p>
-            <a:pPr indent="0" marL="0">
-              <a:lnSpc>
-                <a:spcPts val="2700"/>
-              </a:lnSpc>
-              <a:buNone/>
-            </a:pPr>
-            <a:r>
-              <a:rPr lang="en-US" sz="1900" dirty="0">
-                <a:solidFill>
-                  <a:srgbClr val="24313F"/>
-                </a:solidFill>
-                <a:latin typeface="Georgia" pitchFamily="34" charset="0"/>
-                <a:ea typeface="Georgia" pitchFamily="34" charset="-122"/>
-                <a:cs typeface="Georgia" pitchFamily="34" charset="-120"/>
-              </a:rPr>
-              <a:t>First, the September wager re-run: 'I'm not impacted by media', hands up, the count recorded next to week one's. Then C1 goes to Cambridge in the spring; the film-industry case study opens Section B properly; Paper 2 sits in June. Two artifacts make the crossing: the theory-card deck built since Lesson 02, and the case-study document opened at Lesson 15. These two are the memory.</a:t>
-            </a:r>
-            <a:endParaRPr lang="en-US" sz="1900" dirty="0"/>
-          </a:p>
-        </p:txBody>
-      </p:sp>
-      <p:sp>
-        <p:nvSpPr>
-          <p:cNvPr id="8" name="Text 6"/>
-          <p:cNvSpPr/>
-          <p:nvPr/>
-        </p:nvSpPr>
-        <p:spPr>
-          <a:xfrm>
-            <a:off x="822960" y="4892040"/>
-            <a:ext cx="9875520" cy="457200"/>
-          </a:xfrm>
-          <a:prstGeom prst="rect">
-            <a:avLst/>
-          </a:prstGeom>
-          <a:noFill/>
-          <a:ln/>
-        </p:spPr>
-        <p:txBody>
-          <a:bodyPr wrap="square" lIns="0" tIns="0" rIns="0" bIns="0" rtlCol="0" anchor="ctr"/>
-          <a:lstStyle/>
-          <a:p>
-            <a:pPr indent="0" marL="0">
-              <a:buNone/>
-            </a:pPr>
-            <a:r>
-              <a:rPr lang="en-US" sz="1300" i="1" dirty="0">
-                <a:solidFill>
-                  <a:srgbClr val="7A7F72"/>
-                </a:solidFill>
-                <a:latin typeface="Arial" pitchFamily="34" charset="0"/>
-                <a:ea typeface="Arial" pitchFamily="34" charset="-122"/>
-                <a:cs typeface="Arial" pitchFamily="34" charset="-120"/>
-              </a:rPr>
-              <a:t>Grades and comments due today. The semester ends with every promise the register made, kept.</a:t>
-            </a:r>
-            <a:endParaRPr lang="en-US" sz="1300" dirty="0"/>
-          </a:p>
-        </p:txBody>
-      </p:sp>
-      <p:sp>
-        <p:nvSpPr>
-          <p:cNvPr id="9" name="Shape 7"/>
-          <p:cNvSpPr/>
-          <p:nvPr/>
-        </p:nvSpPr>
-        <p:spPr>
-          <a:xfrm>
-            <a:off x="822960" y="6382512"/>
-            <a:ext cx="10543032" cy="0"/>
-          </a:xfrm>
-          <a:prstGeom prst="line">
-            <a:avLst/>
-          </a:prstGeom>
-          <a:noFill/>
-          <a:ln w="9525">
-            <a:solidFill>
-              <a:srgbClr val="D9D4C4"/>
-            </a:solidFill>
-            <a:prstDash val="solid"/>
-          </a:ln>
-        </p:spPr>
-      </p:sp>
-      <p:sp>
-        <p:nvSpPr>
-          <p:cNvPr id="10" name="Text 8"/>
-          <p:cNvSpPr/>
-          <p:nvPr/>
-        </p:nvSpPr>
-        <p:spPr>
-          <a:xfrm>
-            <a:off x="822960" y="6419088"/>
-            <a:ext cx="7315200" cy="274320"/>
-          </a:xfrm>
-          <a:prstGeom prst="rect">
-            <a:avLst/>
-          </a:prstGeom>
-          <a:noFill/>
-          <a:ln/>
-        </p:spPr>
-        <p:txBody>
-          <a:bodyPr wrap="square" lIns="0" tIns="0" rIns="0" bIns="0" rtlCol="0" anchor="ctr"/>
-          <a:lstStyle/>
-          <a:p>
-            <a:pPr indent="0" marL="0">
-              <a:buNone/>
-            </a:pPr>
-            <a:r>
-              <a:rPr lang="en-US" sz="900" spc="150" kern="0" dirty="0">
-                <a:solidFill>
-                  <a:srgbClr val="7A7F72"/>
-                </a:solidFill>
-                <a:latin typeface="Arial" pitchFamily="34" charset="0"/>
-                <a:ea typeface="Arial" pitchFamily="34" charset="-122"/>
-                <a:cs typeface="Arial" pitchFamily="34" charset="-120"/>
-              </a:rPr>
-              <a:t>MEDIA STUDIES 9607 · SEMESTER I</a:t>
-            </a:r>
-            <a:endParaRPr lang="en-US" sz="900" dirty="0"/>
-          </a:p>
-        </p:txBody>
-      </p:sp>
-      <p:sp>
-        <p:nvSpPr>
-          <p:cNvPr id="11" name="Text 9"/>
-          <p:cNvSpPr/>
-          <p:nvPr/>
-        </p:nvSpPr>
-        <p:spPr>
-          <a:xfrm>
-            <a:off x="10268712" y="6355080"/>
-            <a:ext cx="1097280" cy="365760"/>
-          </a:xfrm>
-          <a:prstGeom prst="rect">
-            <a:avLst/>
-          </a:prstGeom>
-          <a:noFill/>
-          <a:ln/>
-        </p:spPr>
-        <p:txBody>
-          <a:bodyPr wrap="square" lIns="0" tIns="0" rIns="0" bIns="0" rtlCol="0" anchor="ctr"/>
-          <a:lstStyle/>
-          <a:p>
-            <a:pPr algn="r" indent="0" marL="0">
-              <a:buNone/>
-            </a:pPr>
-            <a:r>
-              <a:rPr lang="en-US" sz="1600" dirty="0">
-                <a:solidFill>
-                  <a:srgbClr val="A3C1AD"/>
-                </a:solidFill>
-                <a:latin typeface="Georgia" pitchFamily="34" charset="0"/>
-                <a:ea typeface="Georgia" pitchFamily="34" charset="-122"/>
-                <a:cs typeface="Georgia" pitchFamily="34" charset="-120"/>
-              </a:rPr>
-              <a:t>04</a:t>
-            </a:r>
-            <a:endParaRPr lang="en-US" sz="1600" dirty="0"/>
           </a:p>
         </p:txBody>
       </p:sp>

--- a/content/decks/media-studies/media-studies-s1-lesson-19-end-of-term-exam-and-return.pptx
+++ b/content/decks/media-studies/media-studies-s1-lesson-19-end-of-term-exam-and-return.pptx
@@ -2224,12 +2224,29 @@
           <a:p>
             <a:pPr indent="0" marL="0">
               <a:lnSpc>
-                <a:spcPts val="2700"/>
+                <a:spcPts val="2600"/>
               </a:lnSpc>
               <a:buNone/>
             </a:pPr>
             <a:r>
-              <a:rPr lang="en-US" sz="1900" dirty="0">
+              <a:rPr lang="en-US" sz="1600" b="1" spc="100" kern="0" dirty="0">
+                <a:solidFill>
+                  <a:srgbClr val="4A6B5D"/>
+                </a:solidFill>
+                <a:latin typeface="Arial" pitchFamily="34" charset="0"/>
+                <a:ea typeface="Arial" pitchFamily="34" charset="-122"/>
+                <a:cs typeface="Arial" pitchFamily="34" charset="-120"/>
+              </a:rPr>
+              <a:t>THE RE-VOTE   </a:t>
+            </a:r>
+            <a:pPr indent="0" marL="0">
+              <a:lnSpc>
+                <a:spcPts val="2600"/>
+              </a:lnSpc>
+              <a:buNone/>
+            </a:pPr>
+            <a:r>
+              <a:rPr lang="en-US" sz="1800" dirty="0">
                 <a:solidFill>
                   <a:srgbClr val="24313F"/>
                 </a:solidFill>
@@ -2237,9 +2254,83 @@
                 <a:ea typeface="Georgia" pitchFamily="34" charset="-122"/>
                 <a:cs typeface="Georgia" pitchFamily="34" charset="-120"/>
               </a:rPr>
-              <a:t>First, the September wager re-run: 'I'm not impacted by media', hands up, the count recorded next to week one's. Then C1 goes to Cambridge in the spring; the film-industry case study opens Section B properly; Paper 2 sits in June. Two artifacts make the crossing: the theory-card deck built since Lesson 02, and the case-study document opened at Lesson 15. These two are the memory.</a:t>
-            </a:r>
-            <a:endParaRPr lang="en-US" sz="1900" dirty="0"/>
+              <a:t>September's question again: “I'm not impacted by media.” Hands up. The count goes next to week one's count.</a:t>
+            </a:r>
+            <a:endParaRPr lang="en-US" sz="1600" dirty="0"/>
+          </a:p>
+          <a:p>
+            <a:pPr indent="0" marL="0">
+              <a:lnSpc>
+                <a:spcPts val="2600"/>
+              </a:lnSpc>
+              <a:buNone/>
+            </a:pPr>
+            <a:r>
+              <a:rPr lang="en-US" sz="1600" b="1" spc="100" kern="0" dirty="0">
+                <a:solidFill>
+                  <a:srgbClr val="4A6B5D"/>
+                </a:solidFill>
+                <a:latin typeface="Arial" pitchFamily="34" charset="0"/>
+                <a:ea typeface="Arial" pitchFamily="34" charset="-122"/>
+                <a:cs typeface="Arial" pitchFamily="34" charset="-120"/>
+              </a:rPr>
+              <a:t>SPRING   </a:t>
+            </a:r>
+            <a:pPr indent="0" marL="0">
+              <a:lnSpc>
+                <a:spcPts val="2600"/>
+              </a:lnSpc>
+              <a:buNone/>
+            </a:pPr>
+            <a:r>
+              <a:rPr lang="en-US" sz="1800" dirty="0">
+                <a:solidFill>
+                  <a:srgbClr val="24313F"/>
+                </a:solidFill>
+                <a:latin typeface="Georgia" pitchFamily="34" charset="0"/>
+                <a:ea typeface="Georgia" pitchFamily="34" charset="-122"/>
+                <a:cs typeface="Georgia" pitchFamily="34" charset="-120"/>
+              </a:rPr>
+              <a:t>C1 goes to Cambridge. The film-industry case study opens. Paper 2 sits in June.</a:t>
+            </a:r>
+            <a:endParaRPr lang="en-US" sz="1600" dirty="0"/>
+          </a:p>
+          <a:p>
+            <a:pPr indent="0" marL="0">
+              <a:lnSpc>
+                <a:spcPts val="2600"/>
+              </a:lnSpc>
+              <a:buNone/>
+            </a:pPr>
+            <a:r>
+              <a:rPr lang="en-US" sz="1600" b="1" spc="100" kern="0" dirty="0">
+                <a:solidFill>
+                  <a:srgbClr val="4A6B5D"/>
+                </a:solidFill>
+                <a:latin typeface="Arial" pitchFamily="34" charset="0"/>
+                <a:ea typeface="Arial" pitchFamily="34" charset="-122"/>
+                <a:cs typeface="Arial" pitchFamily="34" charset="-120"/>
+              </a:rPr>
+              <a:t>CARRY THESE   </a:t>
+            </a:r>
+            <a:pPr indent="0" marL="0">
+              <a:lnSpc>
+                <a:spcPts val="2600"/>
+              </a:lnSpc>
+              <a:buNone/>
+            </a:pPr>
+            <a:r>
+              <a:rPr lang="en-US" sz="1800" dirty="0">
+                <a:solidFill>
+                  <a:srgbClr val="24313F"/>
+                </a:solidFill>
+                <a:latin typeface="Georgia" pitchFamily="34" charset="0"/>
+                <a:ea typeface="Georgia" pitchFamily="34" charset="-122"/>
+                <a:cs typeface="Georgia" pitchFamily="34" charset="-120"/>
+              </a:rPr>
+              <a:t>The theory-card deck (since Lesson 02) and the case-study document (since Lesson 15). These two are the memory.</a:t>
+            </a:r>
+            <a:endParaRPr lang="en-US" sz="1600" dirty="0"/>
           </a:p>
         </p:txBody>
       </p:sp>
@@ -3136,6 +3227,23 @@
               <a:buNone/>
             </a:pPr>
             <a:r>
+              <a:rPr lang="en-US" sz="1550" b="1" spc="100" kern="0" dirty="0">
+                <a:solidFill>
+                  <a:srgbClr val="4A6B5D"/>
+                </a:solidFill>
+                <a:latin typeface="Arial" pitchFamily="34" charset="0"/>
+                <a:ea typeface="Arial" pitchFamily="34" charset="-122"/>
+                <a:cs typeface="Arial" pitchFamily="34" charset="-120"/>
+              </a:rPr>
+              <a:t>FORMAT   </a:t>
+            </a:r>
+            <a:pPr indent="0" marL="0">
+              <a:lnSpc>
+                <a:spcPts val="2500"/>
+              </a:lnSpc>
+              <a:buNone/>
+            </a:pPr>
+            <a:r>
               <a:rPr lang="en-US" sz="1750" dirty="0">
                 <a:solidFill>
                   <a:srgbClr val="24313F"/>
@@ -3144,9 +3252,83 @@
                 <a:ea typeface="Georgia" pitchFamily="34" charset="-122"/>
                 <a:cs typeface="Georgia" pitchFamily="34" charset="-120"/>
               </a:rPr>
-              <a:t>The full Component 2 paper, two hours, exam venue, full conditions: Section A on the unseen extract, thirty minutes of viewing and notes plus forty-five writing, then Section B from the contexts menu. The one logistical item that cannot be improvised is the screening: facilities for Section A are booked in advance.</a:t>
-            </a:r>
-            <a:endParaRPr lang="en-US" sz="1750" dirty="0"/>
+              <a:t>The full Component 2 paper: two hours, exam venue, full conditions.</a:t>
+            </a:r>
+            <a:endParaRPr lang="en-US" sz="1550" dirty="0"/>
+          </a:p>
+          <a:p>
+            <a:pPr indent="0" marL="0">
+              <a:lnSpc>
+                <a:spcPts val="2500"/>
+              </a:lnSpc>
+              <a:buNone/>
+            </a:pPr>
+            <a:r>
+              <a:rPr lang="en-US" sz="1550" b="1" spc="100" kern="0" dirty="0">
+                <a:solidFill>
+                  <a:srgbClr val="4A6B5D"/>
+                </a:solidFill>
+                <a:latin typeface="Arial" pitchFamily="34" charset="0"/>
+                <a:ea typeface="Arial" pitchFamily="34" charset="-122"/>
+                <a:cs typeface="Arial" pitchFamily="34" charset="-120"/>
+              </a:rPr>
+              <a:t>SECTION A   </a:t>
+            </a:r>
+            <a:pPr indent="0" marL="0">
+              <a:lnSpc>
+                <a:spcPts val="2500"/>
+              </a:lnSpc>
+              <a:buNone/>
+            </a:pPr>
+            <a:r>
+              <a:rPr lang="en-US" sz="1750" dirty="0">
+                <a:solidFill>
+                  <a:srgbClr val="24313F"/>
+                </a:solidFill>
+                <a:latin typeface="Georgia" pitchFamily="34" charset="0"/>
+                <a:ea typeface="Georgia" pitchFamily="34" charset="-122"/>
+                <a:cs typeface="Georgia" pitchFamily="34" charset="-120"/>
+              </a:rPr>
+              <a:t>An unseen extract. Thirty minutes of viewing and notes, then forty-five of writing.</a:t>
+            </a:r>
+            <a:endParaRPr lang="en-US" sz="1550" dirty="0"/>
+          </a:p>
+          <a:p>
+            <a:pPr indent="0" marL="0">
+              <a:lnSpc>
+                <a:spcPts val="2500"/>
+              </a:lnSpc>
+              <a:buNone/>
+            </a:pPr>
+            <a:r>
+              <a:rPr lang="en-US" sz="1550" b="1" spc="100" kern="0" dirty="0">
+                <a:solidFill>
+                  <a:srgbClr val="4A6B5D"/>
+                </a:solidFill>
+                <a:latin typeface="Arial" pitchFamily="34" charset="0"/>
+                <a:ea typeface="Arial" pitchFamily="34" charset="-122"/>
+                <a:cs typeface="Arial" pitchFamily="34" charset="-120"/>
+              </a:rPr>
+              <a:t>SECTION B   </a:t>
+            </a:r>
+            <a:pPr indent="0" marL="0">
+              <a:lnSpc>
+                <a:spcPts val="2500"/>
+              </a:lnSpc>
+              <a:buNone/>
+            </a:pPr>
+            <a:r>
+              <a:rPr lang="en-US" sz="1750" dirty="0">
+                <a:solidFill>
+                  <a:srgbClr val="24313F"/>
+                </a:solidFill>
+                <a:latin typeface="Georgia" pitchFamily="34" charset="0"/>
+                <a:ea typeface="Georgia" pitchFamily="34" charset="-122"/>
+                <a:cs typeface="Georgia" pitchFamily="34" charset="-120"/>
+              </a:rPr>
+              <a:t>One essay from the contexts menu, forty-five minutes.</a:t>
+            </a:r>
+            <a:endParaRPr lang="en-US" sz="1550" dirty="0"/>
           </a:p>
         </p:txBody>
       </p:sp>
@@ -3186,7 +3368,7 @@
                 <a:ea typeface="Arial" pitchFamily="34" charset="-122"/>
                 <a:cs typeface="Arial" pitchFamily="34" charset="-120"/>
               </a:rPr>
-              <a:t>The exam is an assessment event inside the lesson, not a taught day, per the counting convention.</a:t>
+              <a:t>The Section A screening is booked in advance. You bring pens; the format holds no surprises.</a:t>
             </a:r>
             <a:endParaRPr lang="en-US" sz="1250" dirty="0"/>
           </a:p>
@@ -4701,19 +4883,39 @@
         <p:spPr>
           <a:xfrm>
             <a:off x="822960" y="5943600"/>
-            <a:ext cx="10543032" cy="411480"/>
-          </a:xfrm>
-          <a:prstGeom prst="rect">
-            <a:avLst/>
-          </a:prstGeom>
-          <a:noFill/>
-          <a:ln/>
-        </p:spPr>
-        <p:txBody>
-          <a:bodyPr wrap="square" lIns="0" tIns="0" rIns="0" bIns="0" rtlCol="0" anchor="ctr"/>
+            <a:ext cx="10543032" cy="320040"/>
+          </a:xfrm>
+          <a:prstGeom prst="rect">
+            <a:avLst/>
+          </a:prstGeom>
+          <a:noFill/>
+          <a:ln/>
+        </p:spPr>
+        <p:txBody>
+          <a:bodyPr wrap="square" lIns="0" tIns="0" rIns="0" bIns="0" rtlCol="0" anchor="t"/>
           <a:lstStyle/>
           <a:p>
             <a:pPr indent="0" marL="0">
+              <a:lnSpc>
+                <a:spcPts val="1700"/>
+              </a:lnSpc>
+              <a:buNone/>
+            </a:pPr>
+            <a:r>
+              <a:rPr lang="en-US" sz="1100" b="1" spc="100" kern="0" dirty="0">
+                <a:solidFill>
+                  <a:srgbClr val="4A6B5D"/>
+                </a:solidFill>
+                <a:latin typeface="Arial" pitchFamily="34" charset="0"/>
+                <a:ea typeface="Arial" pitchFamily="34" charset="-122"/>
+                <a:cs typeface="Arial" pitchFamily="34" charset="-120"/>
+              </a:rPr>
+              <a:t>READ IT   </a:t>
+            </a:r>
+            <a:pPr indent="0" marL="0">
+              <a:lnSpc>
+                <a:spcPts val="1700"/>
+              </a:lnSpc>
               <a:buNone/>
             </a:pPr>
             <a:r>
@@ -4725,9 +4927,9 @@
                 <a:ea typeface="Georgia" pitchFamily="34" charset="-122"/>
                 <a:cs typeface="Georgia" pitchFamily="34" charset="-120"/>
               </a:rPr>
-              <a:t>The extract was Servant's opening five minutes. Read the examiners' reading beside your own memory of what you wrote: the gap between the two is Semester 2's syllabus in miniature.</a:t>
-            </a:r>
-            <a:endParaRPr lang="en-US" sz="1300" dirty="0"/>
+              <a:t>The extract was Servant's opening five minutes. Compare the examiners' reading with what you wrote. That gap is your Semester 2 plan, in miniature.</a:t>
+            </a:r>
+            <a:endParaRPr lang="en-US" sz="1100" dirty="0"/>
           </a:p>
         </p:txBody>
       </p:sp>

--- a/content/decks/media-studies/media-studies-s1-lesson-19-end-of-term-exam-and-return.pptx
+++ b/content/decks/media-studies/media-studies-s1-lesson-19-end-of-term-exam-and-return.pptx
@@ -2000,7 +2000,7 @@
                 <a:ea typeface="Arial" pitchFamily="34" charset="-122"/>
                 <a:cs typeface="Arial" pitchFamily="34" charset="-120"/>
               </a:rPr>
-              <a:t>Exam window from Monday 11 January  ·  return Tuesday 19  ·  goals Wednesday 20 January</a:t>
+              <a:t>Exam window from Monday 11 January  ·  return and goals Wednesday 20 January</a:t>
             </a:r>
             <a:endParaRPr lang="en-US" sz="1300" dirty="0"/>
           </a:p>
